--- a/docs/pptx/entire/ritu-entire-linsubhr-ratio-hosp1.pptx
+++ b/docs/pptx/entire/ritu-entire-linsubhr-ratio-hosp1.pptx
@@ -2960,590 +2960,590 @@
           <p:spPr>
             <a:xfrm>
               <a:off x="1172049" y="2073503"/>
-              <a:ext cx="7090630" cy="3350541"/>
+              <a:ext cx="7090630" cy="3351394"/>
             </a:xfrm>
             <a:custGeom>
               <a:avLst/>
               <a:pathLst>
-                <a:path w="7090630" h="3350541">
+                <a:path w="7090630" h="3351394">
                   <a:moveTo>
-                    <a:pt x="533100" y="0"/>
+                    <a:pt x="543193" y="0"/>
                   </a:moveTo>
                   <a:lnTo>
-                    <a:pt x="572980" y="69002"/>
-                  </a:lnTo>
-                  <a:lnTo>
-                    <a:pt x="644602" y="188586"/>
-                  </a:lnTo>
-                  <a:lnTo>
-                    <a:pt x="716225" y="303983"/>
-                  </a:lnTo>
-                  <a:lnTo>
-                    <a:pt x="787847" y="415338"/>
-                  </a:lnTo>
-                  <a:lnTo>
-                    <a:pt x="859470" y="522794"/>
-                  </a:lnTo>
-                  <a:lnTo>
-                    <a:pt x="931092" y="626487"/>
-                  </a:lnTo>
-                  <a:lnTo>
-                    <a:pt x="1002715" y="726548"/>
-                  </a:lnTo>
-                  <a:lnTo>
-                    <a:pt x="1074337" y="823106"/>
-                  </a:lnTo>
-                  <a:lnTo>
-                    <a:pt x="1145960" y="916281"/>
-                  </a:lnTo>
-                  <a:lnTo>
-                    <a:pt x="1217582" y="1006194"/>
-                  </a:lnTo>
-                  <a:lnTo>
-                    <a:pt x="1289205" y="1092958"/>
-                  </a:lnTo>
-                  <a:lnTo>
-                    <a:pt x="1360827" y="1176684"/>
-                  </a:lnTo>
-                  <a:lnTo>
-                    <a:pt x="1432450" y="1257477"/>
-                  </a:lnTo>
-                  <a:lnTo>
-                    <a:pt x="1504073" y="1335441"/>
-                  </a:lnTo>
-                  <a:lnTo>
-                    <a:pt x="1575695" y="1410675"/>
-                  </a:lnTo>
-                  <a:lnTo>
-                    <a:pt x="1647318" y="1483274"/>
-                  </a:lnTo>
-                  <a:lnTo>
-                    <a:pt x="1718940" y="1553331"/>
-                  </a:lnTo>
-                  <a:lnTo>
-                    <a:pt x="1790563" y="1620934"/>
-                  </a:lnTo>
-                  <a:lnTo>
-                    <a:pt x="1862185" y="1686170"/>
-                  </a:lnTo>
-                  <a:lnTo>
-                    <a:pt x="1933808" y="1749121"/>
-                  </a:lnTo>
-                  <a:lnTo>
-                    <a:pt x="2005430" y="1809868"/>
-                  </a:lnTo>
-                  <a:lnTo>
-                    <a:pt x="2077053" y="1868487"/>
-                  </a:lnTo>
-                  <a:lnTo>
-                    <a:pt x="2148675" y="1925054"/>
-                  </a:lnTo>
-                  <a:lnTo>
-                    <a:pt x="2220298" y="1979639"/>
-                  </a:lnTo>
-                  <a:lnTo>
-                    <a:pt x="2291920" y="2032313"/>
-                  </a:lnTo>
-                  <a:lnTo>
-                    <a:pt x="2363543" y="2083142"/>
-                  </a:lnTo>
-                  <a:lnTo>
-                    <a:pt x="2435165" y="2132192"/>
-                  </a:lnTo>
-                  <a:lnTo>
-                    <a:pt x="2506788" y="2179523"/>
-                  </a:lnTo>
-                  <a:lnTo>
-                    <a:pt x="2578410" y="2225197"/>
-                  </a:lnTo>
-                  <a:lnTo>
-                    <a:pt x="2650033" y="2269272"/>
-                  </a:lnTo>
-                  <a:lnTo>
-                    <a:pt x="2721655" y="2311803"/>
-                  </a:lnTo>
-                  <a:lnTo>
-                    <a:pt x="2793278" y="2352844"/>
-                  </a:lnTo>
-                  <a:lnTo>
-                    <a:pt x="2864901" y="2392448"/>
-                  </a:lnTo>
-                  <a:lnTo>
-                    <a:pt x="2936523" y="2430666"/>
-                  </a:lnTo>
-                  <a:lnTo>
-                    <a:pt x="3008146" y="2467545"/>
-                  </a:lnTo>
-                  <a:lnTo>
-                    <a:pt x="3079768" y="2503132"/>
-                  </a:lnTo>
-                  <a:lnTo>
-                    <a:pt x="3151391" y="2537473"/>
-                  </a:lnTo>
-                  <a:lnTo>
-                    <a:pt x="3223013" y="2570612"/>
-                  </a:lnTo>
-                  <a:lnTo>
-                    <a:pt x="3294636" y="2602590"/>
-                  </a:lnTo>
-                  <a:lnTo>
-                    <a:pt x="3366258" y="2633448"/>
-                  </a:lnTo>
-                  <a:lnTo>
-                    <a:pt x="3437881" y="2653625"/>
-                  </a:lnTo>
-                  <a:lnTo>
-                    <a:pt x="3509503" y="2651459"/>
-                  </a:lnTo>
-                  <a:lnTo>
-                    <a:pt x="3581126" y="2649287"/>
-                  </a:lnTo>
-                  <a:lnTo>
-                    <a:pt x="3652748" y="2647110"/>
-                  </a:lnTo>
-                  <a:lnTo>
-                    <a:pt x="3724371" y="2644927"/>
-                  </a:lnTo>
-                  <a:lnTo>
-                    <a:pt x="3795993" y="2642738"/>
-                  </a:lnTo>
-                  <a:lnTo>
-                    <a:pt x="3867616" y="2640543"/>
-                  </a:lnTo>
-                  <a:lnTo>
-                    <a:pt x="3939238" y="2638343"/>
-                  </a:lnTo>
-                  <a:lnTo>
-                    <a:pt x="4010861" y="2636137"/>
-                  </a:lnTo>
-                  <a:lnTo>
-                    <a:pt x="4082483" y="2633925"/>
-                  </a:lnTo>
-                  <a:lnTo>
-                    <a:pt x="4154106" y="2631707"/>
-                  </a:lnTo>
-                  <a:lnTo>
-                    <a:pt x="4225729" y="2629484"/>
-                  </a:lnTo>
-                  <a:lnTo>
-                    <a:pt x="4297351" y="2627255"/>
-                  </a:lnTo>
-                  <a:lnTo>
-                    <a:pt x="4368974" y="2625020"/>
-                  </a:lnTo>
-                  <a:lnTo>
-                    <a:pt x="4440596" y="2622779"/>
-                  </a:lnTo>
-                  <a:lnTo>
-                    <a:pt x="4512219" y="2620532"/>
-                  </a:lnTo>
-                  <a:lnTo>
-                    <a:pt x="4583841" y="2618279"/>
-                  </a:lnTo>
-                  <a:lnTo>
-                    <a:pt x="4655464" y="2616021"/>
-                  </a:lnTo>
-                  <a:lnTo>
-                    <a:pt x="4727086" y="2613757"/>
-                  </a:lnTo>
-                  <a:lnTo>
-                    <a:pt x="4798709" y="2611486"/>
-                  </a:lnTo>
-                  <a:lnTo>
-                    <a:pt x="4870331" y="2609210"/>
-                  </a:lnTo>
-                  <a:lnTo>
-                    <a:pt x="4941954" y="2606928"/>
-                  </a:lnTo>
-                  <a:lnTo>
-                    <a:pt x="5013576" y="2604640"/>
-                  </a:lnTo>
-                  <a:lnTo>
-                    <a:pt x="5085199" y="2602346"/>
-                  </a:lnTo>
-                  <a:lnTo>
-                    <a:pt x="5156821" y="2600046"/>
-                  </a:lnTo>
-                  <a:lnTo>
-                    <a:pt x="5228444" y="2597740"/>
-                  </a:lnTo>
-                  <a:lnTo>
-                    <a:pt x="5300066" y="2595428"/>
-                  </a:lnTo>
-                  <a:lnTo>
-                    <a:pt x="5371689" y="2593110"/>
-                  </a:lnTo>
-                  <a:lnTo>
-                    <a:pt x="5443311" y="2590786"/>
-                  </a:lnTo>
-                  <a:lnTo>
-                    <a:pt x="5514934" y="2588456"/>
-                  </a:lnTo>
-                  <a:lnTo>
-                    <a:pt x="5586557" y="2586119"/>
-                  </a:lnTo>
-                  <a:lnTo>
-                    <a:pt x="5658179" y="2583777"/>
-                  </a:lnTo>
-                  <a:lnTo>
-                    <a:pt x="5729802" y="2581429"/>
-                  </a:lnTo>
-                  <a:lnTo>
-                    <a:pt x="5801424" y="2579074"/>
-                  </a:lnTo>
-                  <a:lnTo>
-                    <a:pt x="5873047" y="2576713"/>
-                  </a:lnTo>
-                  <a:lnTo>
-                    <a:pt x="5944669" y="2574346"/>
-                  </a:lnTo>
-                  <a:lnTo>
-                    <a:pt x="6016292" y="2571973"/>
-                  </a:lnTo>
-                  <a:lnTo>
-                    <a:pt x="6087914" y="2569594"/>
-                  </a:lnTo>
-                  <a:lnTo>
-                    <a:pt x="6159537" y="2567209"/>
-                  </a:lnTo>
-                  <a:lnTo>
-                    <a:pt x="6231159" y="2564817"/>
-                  </a:lnTo>
-                  <a:lnTo>
-                    <a:pt x="6302782" y="2562419"/>
-                  </a:lnTo>
-                  <a:lnTo>
-                    <a:pt x="6374404" y="2560015"/>
-                  </a:lnTo>
-                  <a:lnTo>
-                    <a:pt x="6446027" y="2557604"/>
-                  </a:lnTo>
-                  <a:lnTo>
-                    <a:pt x="6517649" y="2555187"/>
-                  </a:lnTo>
-                  <a:lnTo>
-                    <a:pt x="6589272" y="2552764"/>
-                  </a:lnTo>
-                  <a:lnTo>
-                    <a:pt x="6660894" y="2550335"/>
-                  </a:lnTo>
-                  <a:lnTo>
-                    <a:pt x="6732517" y="2547899"/>
-                  </a:lnTo>
-                  <a:lnTo>
-                    <a:pt x="6804139" y="2545457"/>
-                  </a:lnTo>
-                  <a:lnTo>
-                    <a:pt x="6875762" y="2543009"/>
-                  </a:lnTo>
-                  <a:lnTo>
-                    <a:pt x="6947385" y="2540554"/>
-                  </a:lnTo>
-                  <a:lnTo>
-                    <a:pt x="7019007" y="2538093"/>
-                  </a:lnTo>
-                  <a:lnTo>
-                    <a:pt x="7090630" y="2535625"/>
-                  </a:lnTo>
-                  <a:lnTo>
-                    <a:pt x="7090630" y="3350541"/>
-                  </a:lnTo>
-                  <a:lnTo>
-                    <a:pt x="7019007" y="3345707"/>
-                  </a:lnTo>
-                  <a:lnTo>
-                    <a:pt x="6947385" y="3340697"/>
-                  </a:lnTo>
-                  <a:lnTo>
-                    <a:pt x="6875762" y="3335506"/>
-                  </a:lnTo>
-                  <a:lnTo>
-                    <a:pt x="6804139" y="3330126"/>
-                  </a:lnTo>
-                  <a:lnTo>
-                    <a:pt x="6732517" y="3324551"/>
-                  </a:lnTo>
-                  <a:lnTo>
-                    <a:pt x="6660894" y="3318774"/>
-                  </a:lnTo>
-                  <a:lnTo>
-                    <a:pt x="6589272" y="3312787"/>
-                  </a:lnTo>
-                  <a:lnTo>
-                    <a:pt x="6517649" y="3306582"/>
-                  </a:lnTo>
-                  <a:lnTo>
-                    <a:pt x="6446027" y="3300153"/>
-                  </a:lnTo>
-                  <a:lnTo>
-                    <a:pt x="6374404" y="3293490"/>
-                  </a:lnTo>
-                  <a:lnTo>
-                    <a:pt x="6302782" y="3286585"/>
-                  </a:lnTo>
-                  <a:lnTo>
-                    <a:pt x="6231159" y="3279430"/>
-                  </a:lnTo>
-                  <a:lnTo>
-                    <a:pt x="6159537" y="3272015"/>
-                  </a:lnTo>
-                  <a:lnTo>
-                    <a:pt x="6087914" y="3264331"/>
-                  </a:lnTo>
-                  <a:lnTo>
-                    <a:pt x="6016292" y="3256369"/>
-                  </a:lnTo>
-                  <a:lnTo>
-                    <a:pt x="5944669" y="3248117"/>
-                  </a:lnTo>
-                  <a:lnTo>
-                    <a:pt x="5873047" y="3239566"/>
-                  </a:lnTo>
-                  <a:lnTo>
-                    <a:pt x="5801424" y="3230704"/>
-                  </a:lnTo>
-                  <a:lnTo>
-                    <a:pt x="5729802" y="3221521"/>
-                  </a:lnTo>
-                  <a:lnTo>
-                    <a:pt x="5658179" y="3212005"/>
-                  </a:lnTo>
-                  <a:lnTo>
-                    <a:pt x="5586557" y="3202143"/>
-                  </a:lnTo>
-                  <a:lnTo>
-                    <a:pt x="5514934" y="3191923"/>
-                  </a:lnTo>
-                  <a:lnTo>
-                    <a:pt x="5443311" y="3181333"/>
-                  </a:lnTo>
-                  <a:lnTo>
-                    <a:pt x="5371689" y="3170358"/>
-                  </a:lnTo>
-                  <a:lnTo>
-                    <a:pt x="5300066" y="3158985"/>
-                  </a:lnTo>
-                  <a:lnTo>
-                    <a:pt x="5228444" y="3147199"/>
-                  </a:lnTo>
-                  <a:lnTo>
-                    <a:pt x="5156821" y="3134985"/>
-                  </a:lnTo>
-                  <a:lnTo>
-                    <a:pt x="5085199" y="3122328"/>
-                  </a:lnTo>
-                  <a:lnTo>
-                    <a:pt x="5013576" y="3109212"/>
-                  </a:lnTo>
-                  <a:lnTo>
-                    <a:pt x="4941954" y="3095620"/>
-                  </a:lnTo>
-                  <a:lnTo>
-                    <a:pt x="4870331" y="3081534"/>
-                  </a:lnTo>
-                  <a:lnTo>
-                    <a:pt x="4798709" y="3066937"/>
-                  </a:lnTo>
-                  <a:lnTo>
-                    <a:pt x="4727086" y="3051811"/>
-                  </a:lnTo>
-                  <a:lnTo>
-                    <a:pt x="4655464" y="3036136"/>
-                  </a:lnTo>
-                  <a:lnTo>
-                    <a:pt x="4583841" y="3019891"/>
-                  </a:lnTo>
-                  <a:lnTo>
-                    <a:pt x="4512219" y="3003058"/>
-                  </a:lnTo>
-                  <a:lnTo>
-                    <a:pt x="4440596" y="2985613"/>
-                  </a:lnTo>
-                  <a:lnTo>
-                    <a:pt x="4368974" y="2967535"/>
-                  </a:lnTo>
-                  <a:lnTo>
-                    <a:pt x="4297351" y="2948802"/>
-                  </a:lnTo>
-                  <a:lnTo>
-                    <a:pt x="4225729" y="2929388"/>
-                  </a:lnTo>
-                  <a:lnTo>
-                    <a:pt x="4154106" y="2909270"/>
-                  </a:lnTo>
-                  <a:lnTo>
-                    <a:pt x="4082483" y="2888421"/>
-                  </a:lnTo>
-                  <a:lnTo>
-                    <a:pt x="4010861" y="2866816"/>
-                  </a:lnTo>
-                  <a:lnTo>
-                    <a:pt x="3939238" y="2844427"/>
-                  </a:lnTo>
-                  <a:lnTo>
-                    <a:pt x="3867616" y="2821226"/>
-                  </a:lnTo>
-                  <a:lnTo>
-                    <a:pt x="3795993" y="2797182"/>
-                  </a:lnTo>
-                  <a:lnTo>
-                    <a:pt x="3724371" y="2772266"/>
-                  </a:lnTo>
-                  <a:lnTo>
-                    <a:pt x="3652748" y="2746446"/>
-                  </a:lnTo>
-                  <a:lnTo>
-                    <a:pt x="3581126" y="2719689"/>
-                  </a:lnTo>
-                  <a:lnTo>
-                    <a:pt x="3509503" y="2691960"/>
-                  </a:lnTo>
-                  <a:lnTo>
-                    <a:pt x="3437881" y="2663226"/>
-                  </a:lnTo>
-                  <a:lnTo>
-                    <a:pt x="3366258" y="2655786"/>
-                  </a:lnTo>
-                  <a:lnTo>
-                    <a:pt x="3294636" y="2657941"/>
-                  </a:lnTo>
-                  <a:lnTo>
-                    <a:pt x="3223013" y="2660090"/>
-                  </a:lnTo>
-                  <a:lnTo>
-                    <a:pt x="3151391" y="2662234"/>
-                  </a:lnTo>
-                  <a:lnTo>
-                    <a:pt x="3079768" y="2664372"/>
-                  </a:lnTo>
-                  <a:lnTo>
-                    <a:pt x="3008146" y="2666505"/>
-                  </a:lnTo>
-                  <a:lnTo>
-                    <a:pt x="2936523" y="2668632"/>
-                  </a:lnTo>
-                  <a:lnTo>
-                    <a:pt x="2864901" y="2670753"/>
-                  </a:lnTo>
-                  <a:lnTo>
-                    <a:pt x="2793278" y="2672869"/>
-                  </a:lnTo>
-                  <a:lnTo>
-                    <a:pt x="2721655" y="2674980"/>
-                  </a:lnTo>
-                  <a:lnTo>
-                    <a:pt x="2650033" y="2677085"/>
-                  </a:lnTo>
-                  <a:lnTo>
-                    <a:pt x="2578410" y="2679184"/>
-                  </a:lnTo>
-                  <a:lnTo>
-                    <a:pt x="2506788" y="2681278"/>
-                  </a:lnTo>
-                  <a:lnTo>
-                    <a:pt x="2435165" y="2683367"/>
-                  </a:lnTo>
-                  <a:lnTo>
-                    <a:pt x="2363543" y="2685450"/>
-                  </a:lnTo>
-                  <a:lnTo>
-                    <a:pt x="2291920" y="2687528"/>
-                  </a:lnTo>
-                  <a:lnTo>
-                    <a:pt x="2220298" y="2689600"/>
-                  </a:lnTo>
-                  <a:lnTo>
-                    <a:pt x="2148675" y="2691667"/>
-                  </a:lnTo>
-                  <a:lnTo>
-                    <a:pt x="2077053" y="2693728"/>
-                  </a:lnTo>
-                  <a:lnTo>
-                    <a:pt x="2005430" y="2695785"/>
-                  </a:lnTo>
-                  <a:lnTo>
-                    <a:pt x="1933808" y="2697835"/>
-                  </a:lnTo>
-                  <a:lnTo>
-                    <a:pt x="1862185" y="2699881"/>
-                  </a:lnTo>
-                  <a:lnTo>
-                    <a:pt x="1790563" y="2701921"/>
-                  </a:lnTo>
-                  <a:lnTo>
-                    <a:pt x="1718940" y="2703956"/>
-                  </a:lnTo>
-                  <a:lnTo>
-                    <a:pt x="1647318" y="2705986"/>
-                  </a:lnTo>
-                  <a:lnTo>
-                    <a:pt x="1575695" y="2708010"/>
-                  </a:lnTo>
-                  <a:lnTo>
-                    <a:pt x="1504073" y="2710029"/>
-                  </a:lnTo>
-                  <a:lnTo>
-                    <a:pt x="1432450" y="2712043"/>
-                  </a:lnTo>
-                  <a:lnTo>
-                    <a:pt x="1360827" y="2714051"/>
-                  </a:lnTo>
-                  <a:lnTo>
-                    <a:pt x="1289205" y="2716054"/>
-                  </a:lnTo>
-                  <a:lnTo>
-                    <a:pt x="1217582" y="2718052"/>
-                  </a:lnTo>
-                  <a:lnTo>
-                    <a:pt x="1145960" y="2720045"/>
-                  </a:lnTo>
-                  <a:lnTo>
-                    <a:pt x="1074337" y="2722033"/>
-                  </a:lnTo>
-                  <a:lnTo>
-                    <a:pt x="1002715" y="2724016"/>
-                  </a:lnTo>
-                  <a:lnTo>
-                    <a:pt x="931092" y="2725993"/>
-                  </a:lnTo>
-                  <a:lnTo>
-                    <a:pt x="859470" y="2727965"/>
-                  </a:lnTo>
-                  <a:lnTo>
-                    <a:pt x="787847" y="2729932"/>
-                  </a:lnTo>
-                  <a:lnTo>
-                    <a:pt x="716225" y="2731894"/>
-                  </a:lnTo>
-                  <a:lnTo>
-                    <a:pt x="644602" y="2733851"/>
-                  </a:lnTo>
-                  <a:lnTo>
-                    <a:pt x="572980" y="2735803"/>
-                  </a:lnTo>
-                  <a:lnTo>
-                    <a:pt x="501357" y="2737749"/>
-                  </a:lnTo>
-                  <a:lnTo>
-                    <a:pt x="429735" y="2739691"/>
-                  </a:lnTo>
-                  <a:lnTo>
-                    <a:pt x="358112" y="2741628"/>
-                  </a:lnTo>
-                  <a:lnTo>
-                    <a:pt x="286490" y="2743559"/>
-                  </a:lnTo>
-                  <a:lnTo>
-                    <a:pt x="214867" y="2745486"/>
-                  </a:lnTo>
-                  <a:lnTo>
-                    <a:pt x="143245" y="2747407"/>
-                  </a:lnTo>
-                  <a:lnTo>
-                    <a:pt x="71622" y="2749324"/>
-                  </a:lnTo>
-                  <a:lnTo>
-                    <a:pt x="0" y="2751235"/>
+                    <a:pt x="572980" y="51980"/>
+                  </a:lnTo>
+                  <a:lnTo>
+                    <a:pt x="644602" y="172575"/>
+                  </a:lnTo>
+                  <a:lnTo>
+                    <a:pt x="716225" y="288933"/>
+                  </a:lnTo>
+                  <a:lnTo>
+                    <a:pt x="787847" y="401202"/>
+                  </a:lnTo>
+                  <a:lnTo>
+                    <a:pt x="859470" y="509525"/>
+                  </a:lnTo>
+                  <a:lnTo>
+                    <a:pt x="931092" y="614042"/>
+                  </a:lnTo>
+                  <a:lnTo>
+                    <a:pt x="1002715" y="714886"/>
+                  </a:lnTo>
+                  <a:lnTo>
+                    <a:pt x="1074337" y="812187"/>
+                  </a:lnTo>
+                  <a:lnTo>
+                    <a:pt x="1145960" y="906068"/>
+                  </a:lnTo>
+                  <a:lnTo>
+                    <a:pt x="1217582" y="996650"/>
+                  </a:lnTo>
+                  <a:lnTo>
+                    <a:pt x="1289205" y="1084049"/>
+                  </a:lnTo>
+                  <a:lnTo>
+                    <a:pt x="1360827" y="1168376"/>
+                  </a:lnTo>
+                  <a:lnTo>
+                    <a:pt x="1432450" y="1249740"/>
+                  </a:lnTo>
+                  <a:lnTo>
+                    <a:pt x="1504073" y="1328245"/>
+                  </a:lnTo>
+                  <a:lnTo>
+                    <a:pt x="1575695" y="1403992"/>
+                  </a:lnTo>
+                  <a:lnTo>
+                    <a:pt x="1647318" y="1477076"/>
+                  </a:lnTo>
+                  <a:lnTo>
+                    <a:pt x="1718940" y="1547593"/>
+                  </a:lnTo>
+                  <a:lnTo>
+                    <a:pt x="1790563" y="1615631"/>
+                  </a:lnTo>
+                  <a:lnTo>
+                    <a:pt x="1862185" y="1681278"/>
+                  </a:lnTo>
+                  <a:lnTo>
+                    <a:pt x="1933808" y="1744619"/>
+                  </a:lnTo>
+                  <a:lnTo>
+                    <a:pt x="2005430" y="1805733"/>
+                  </a:lnTo>
+                  <a:lnTo>
+                    <a:pt x="2077053" y="1864700"/>
+                  </a:lnTo>
+                  <a:lnTo>
+                    <a:pt x="2148675" y="1921595"/>
+                  </a:lnTo>
+                  <a:lnTo>
+                    <a:pt x="2220298" y="1976490"/>
+                  </a:lnTo>
+                  <a:lnTo>
+                    <a:pt x="2291920" y="2029457"/>
+                  </a:lnTo>
+                  <a:lnTo>
+                    <a:pt x="2363543" y="2080562"/>
+                  </a:lnTo>
+                  <a:lnTo>
+                    <a:pt x="2435165" y="2129871"/>
+                  </a:lnTo>
+                  <a:lnTo>
+                    <a:pt x="2506788" y="2177447"/>
+                  </a:lnTo>
+                  <a:lnTo>
+                    <a:pt x="2578410" y="2223352"/>
+                  </a:lnTo>
+                  <a:lnTo>
+                    <a:pt x="2650033" y="2267643"/>
+                  </a:lnTo>
+                  <a:lnTo>
+                    <a:pt x="2721655" y="2310378"/>
+                  </a:lnTo>
+                  <a:lnTo>
+                    <a:pt x="2793278" y="2351612"/>
+                  </a:lnTo>
+                  <a:lnTo>
+                    <a:pt x="2864901" y="2391396"/>
+                  </a:lnTo>
+                  <a:lnTo>
+                    <a:pt x="2936523" y="2429782"/>
+                  </a:lnTo>
+                  <a:lnTo>
+                    <a:pt x="3008146" y="2466819"/>
+                  </a:lnTo>
+                  <a:lnTo>
+                    <a:pt x="3079768" y="2502555"/>
+                  </a:lnTo>
+                  <a:lnTo>
+                    <a:pt x="3151391" y="2537035"/>
+                  </a:lnTo>
+                  <a:lnTo>
+                    <a:pt x="3223013" y="2570303"/>
+                  </a:lnTo>
+                  <a:lnTo>
+                    <a:pt x="3294636" y="2602403"/>
+                  </a:lnTo>
+                  <a:lnTo>
+                    <a:pt x="3366258" y="2633374"/>
+                  </a:lnTo>
+                  <a:lnTo>
+                    <a:pt x="3437881" y="2653645"/>
+                  </a:lnTo>
+                  <a:lnTo>
+                    <a:pt x="3509503" y="2651543"/>
+                  </a:lnTo>
+                  <a:lnTo>
+                    <a:pt x="3581126" y="2649435"/>
+                  </a:lnTo>
+                  <a:lnTo>
+                    <a:pt x="3652748" y="2647322"/>
+                  </a:lnTo>
+                  <a:lnTo>
+                    <a:pt x="3724371" y="2645204"/>
+                  </a:lnTo>
+                  <a:lnTo>
+                    <a:pt x="3795993" y="2643081"/>
+                  </a:lnTo>
+                  <a:lnTo>
+                    <a:pt x="3867616" y="2640952"/>
+                  </a:lnTo>
+                  <a:lnTo>
+                    <a:pt x="3939238" y="2638818"/>
+                  </a:lnTo>
+                  <a:lnTo>
+                    <a:pt x="4010861" y="2636678"/>
+                  </a:lnTo>
+                  <a:lnTo>
+                    <a:pt x="4082483" y="2634533"/>
+                  </a:lnTo>
+                  <a:lnTo>
+                    <a:pt x="4154106" y="2632383"/>
+                  </a:lnTo>
+                  <a:lnTo>
+                    <a:pt x="4225729" y="2630227"/>
+                  </a:lnTo>
+                  <a:lnTo>
+                    <a:pt x="4297351" y="2628065"/>
+                  </a:lnTo>
+                  <a:lnTo>
+                    <a:pt x="4368974" y="2625899"/>
+                  </a:lnTo>
+                  <a:lnTo>
+                    <a:pt x="4440596" y="2623726"/>
+                  </a:lnTo>
+                  <a:lnTo>
+                    <a:pt x="4512219" y="2621548"/>
+                  </a:lnTo>
+                  <a:lnTo>
+                    <a:pt x="4583841" y="2619365"/>
+                  </a:lnTo>
+                  <a:lnTo>
+                    <a:pt x="4655464" y="2617176"/>
+                  </a:lnTo>
+                  <a:lnTo>
+                    <a:pt x="4727086" y="2614982"/>
+                  </a:lnTo>
+                  <a:lnTo>
+                    <a:pt x="4798709" y="2612782"/>
+                  </a:lnTo>
+                  <a:lnTo>
+                    <a:pt x="4870331" y="2610576"/>
+                  </a:lnTo>
+                  <a:lnTo>
+                    <a:pt x="4941954" y="2608365"/>
+                  </a:lnTo>
+                  <a:lnTo>
+                    <a:pt x="5013576" y="2606148"/>
+                  </a:lnTo>
+                  <a:lnTo>
+                    <a:pt x="5085199" y="2603926"/>
+                  </a:lnTo>
+                  <a:lnTo>
+                    <a:pt x="5156821" y="2601698"/>
+                  </a:lnTo>
+                  <a:lnTo>
+                    <a:pt x="5228444" y="2599464"/>
+                  </a:lnTo>
+                  <a:lnTo>
+                    <a:pt x="5300066" y="2597225"/>
+                  </a:lnTo>
+                  <a:lnTo>
+                    <a:pt x="5371689" y="2594980"/>
+                  </a:lnTo>
+                  <a:lnTo>
+                    <a:pt x="5443311" y="2592730"/>
+                  </a:lnTo>
+                  <a:lnTo>
+                    <a:pt x="5514934" y="2590473"/>
+                  </a:lnTo>
+                  <a:lnTo>
+                    <a:pt x="5586557" y="2588211"/>
+                  </a:lnTo>
+                  <a:lnTo>
+                    <a:pt x="5658179" y="2585943"/>
+                  </a:lnTo>
+                  <a:lnTo>
+                    <a:pt x="5729802" y="2583670"/>
+                  </a:lnTo>
+                  <a:lnTo>
+                    <a:pt x="5801424" y="2581391"/>
+                  </a:lnTo>
+                  <a:lnTo>
+                    <a:pt x="5873047" y="2579106"/>
+                  </a:lnTo>
+                  <a:lnTo>
+                    <a:pt x="5944669" y="2576815"/>
+                  </a:lnTo>
+                  <a:lnTo>
+                    <a:pt x="6016292" y="2574518"/>
+                  </a:lnTo>
+                  <a:lnTo>
+                    <a:pt x="6087914" y="2572216"/>
+                  </a:lnTo>
+                  <a:lnTo>
+                    <a:pt x="6159537" y="2569907"/>
+                  </a:lnTo>
+                  <a:lnTo>
+                    <a:pt x="6231159" y="2567593"/>
+                  </a:lnTo>
+                  <a:lnTo>
+                    <a:pt x="6302782" y="2565273"/>
+                  </a:lnTo>
+                  <a:lnTo>
+                    <a:pt x="6374404" y="2562947"/>
+                  </a:lnTo>
+                  <a:lnTo>
+                    <a:pt x="6446027" y="2560616"/>
+                  </a:lnTo>
+                  <a:lnTo>
+                    <a:pt x="6517649" y="2558278"/>
+                  </a:lnTo>
+                  <a:lnTo>
+                    <a:pt x="6589272" y="2555934"/>
+                  </a:lnTo>
+                  <a:lnTo>
+                    <a:pt x="6660894" y="2553585"/>
+                  </a:lnTo>
+                  <a:lnTo>
+                    <a:pt x="6732517" y="2551229"/>
+                  </a:lnTo>
+                  <a:lnTo>
+                    <a:pt x="6804139" y="2548868"/>
+                  </a:lnTo>
+                  <a:lnTo>
+                    <a:pt x="6875762" y="2546501"/>
+                  </a:lnTo>
+                  <a:lnTo>
+                    <a:pt x="6947385" y="2544127"/>
+                  </a:lnTo>
+                  <a:lnTo>
+                    <a:pt x="7019007" y="2541748"/>
+                  </a:lnTo>
+                  <a:lnTo>
+                    <a:pt x="7090630" y="2539362"/>
+                  </a:lnTo>
+                  <a:lnTo>
+                    <a:pt x="7090630" y="3351394"/>
+                  </a:lnTo>
+                  <a:lnTo>
+                    <a:pt x="7019007" y="3346574"/>
+                  </a:lnTo>
+                  <a:lnTo>
+                    <a:pt x="6947385" y="3341578"/>
+                  </a:lnTo>
+                  <a:lnTo>
+                    <a:pt x="6875762" y="3336400"/>
+                  </a:lnTo>
+                  <a:lnTo>
+                    <a:pt x="6804139" y="3331034"/>
+                  </a:lnTo>
+                  <a:lnTo>
+                    <a:pt x="6732517" y="3325472"/>
+                  </a:lnTo>
+                  <a:lnTo>
+                    <a:pt x="6660894" y="3319707"/>
+                  </a:lnTo>
+                  <a:lnTo>
+                    <a:pt x="6589272" y="3313733"/>
+                  </a:lnTo>
+                  <a:lnTo>
+                    <a:pt x="6517649" y="3307541"/>
+                  </a:lnTo>
+                  <a:lnTo>
+                    <a:pt x="6446027" y="3301123"/>
+                  </a:lnTo>
+                  <a:lnTo>
+                    <a:pt x="6374404" y="3294472"/>
+                  </a:lnTo>
+                  <a:lnTo>
+                    <a:pt x="6302782" y="3287578"/>
+                  </a:lnTo>
+                  <a:lnTo>
+                    <a:pt x="6231159" y="3280434"/>
+                  </a:lnTo>
+                  <a:lnTo>
+                    <a:pt x="6159537" y="3273029"/>
+                  </a:lnTo>
+                  <a:lnTo>
+                    <a:pt x="6087914" y="3265354"/>
+                  </a:lnTo>
+                  <a:lnTo>
+                    <a:pt x="6016292" y="3257400"/>
+                  </a:lnTo>
+                  <a:lnTo>
+                    <a:pt x="5944669" y="3249157"/>
+                  </a:lnTo>
+                  <a:lnTo>
+                    <a:pt x="5873047" y="3240613"/>
+                  </a:lnTo>
+                  <a:lnTo>
+                    <a:pt x="5801424" y="3231758"/>
+                  </a:lnTo>
+                  <a:lnTo>
+                    <a:pt x="5729802" y="3222580"/>
+                  </a:lnTo>
+                  <a:lnTo>
+                    <a:pt x="5658179" y="3213068"/>
+                  </a:lnTo>
+                  <a:lnTo>
+                    <a:pt x="5586557" y="3203210"/>
+                  </a:lnTo>
+                  <a:lnTo>
+                    <a:pt x="5514934" y="3192992"/>
+                  </a:lnTo>
+                  <a:lnTo>
+                    <a:pt x="5443311" y="3182403"/>
+                  </a:lnTo>
+                  <a:lnTo>
+                    <a:pt x="5371689" y="3171428"/>
+                  </a:lnTo>
+                  <a:lnTo>
+                    <a:pt x="5300066" y="3160053"/>
+                  </a:lnTo>
+                  <a:lnTo>
+                    <a:pt x="5228444" y="3148264"/>
+                  </a:lnTo>
+                  <a:lnTo>
+                    <a:pt x="5156821" y="3136045"/>
+                  </a:lnTo>
+                  <a:lnTo>
+                    <a:pt x="5085199" y="3123382"/>
+                  </a:lnTo>
+                  <a:lnTo>
+                    <a:pt x="5013576" y="3110257"/>
+                  </a:lnTo>
+                  <a:lnTo>
+                    <a:pt x="4941954" y="3096654"/>
+                  </a:lnTo>
+                  <a:lnTo>
+                    <a:pt x="4870331" y="3082556"/>
+                  </a:lnTo>
+                  <a:lnTo>
+                    <a:pt x="4798709" y="3067944"/>
+                  </a:lnTo>
+                  <a:lnTo>
+                    <a:pt x="4727086" y="3052800"/>
+                  </a:lnTo>
+                  <a:lnTo>
+                    <a:pt x="4655464" y="3037105"/>
+                  </a:lnTo>
+                  <a:lnTo>
+                    <a:pt x="4583841" y="3020838"/>
+                  </a:lnTo>
+                  <a:lnTo>
+                    <a:pt x="4512219" y="3003978"/>
+                  </a:lnTo>
+                  <a:lnTo>
+                    <a:pt x="4440596" y="2986505"/>
+                  </a:lnTo>
+                  <a:lnTo>
+                    <a:pt x="4368974" y="2968395"/>
+                  </a:lnTo>
+                  <a:lnTo>
+                    <a:pt x="4297351" y="2949625"/>
+                  </a:lnTo>
+                  <a:lnTo>
+                    <a:pt x="4225729" y="2930172"/>
+                  </a:lnTo>
+                  <a:lnTo>
+                    <a:pt x="4154106" y="2910011"/>
+                  </a:lnTo>
+                  <a:lnTo>
+                    <a:pt x="4082483" y="2889115"/>
+                  </a:lnTo>
+                  <a:lnTo>
+                    <a:pt x="4010861" y="2867458"/>
+                  </a:lnTo>
+                  <a:lnTo>
+                    <a:pt x="3939238" y="2845012"/>
+                  </a:lnTo>
+                  <a:lnTo>
+                    <a:pt x="3867616" y="2821749"/>
+                  </a:lnTo>
+                  <a:lnTo>
+                    <a:pt x="3795993" y="2797638"/>
+                  </a:lnTo>
+                  <a:lnTo>
+                    <a:pt x="3724371" y="2772650"/>
+                  </a:lnTo>
+                  <a:lnTo>
+                    <a:pt x="3652748" y="2746751"/>
+                  </a:lnTo>
+                  <a:lnTo>
+                    <a:pt x="3581126" y="2719909"/>
+                  </a:lnTo>
+                  <a:lnTo>
+                    <a:pt x="3509503" y="2692090"/>
+                  </a:lnTo>
+                  <a:lnTo>
+                    <a:pt x="3437881" y="2663257"/>
+                  </a:lnTo>
+                  <a:lnTo>
+                    <a:pt x="3366258" y="2655741"/>
+                  </a:lnTo>
+                  <a:lnTo>
+                    <a:pt x="3294636" y="2657833"/>
+                  </a:lnTo>
+                  <a:lnTo>
+                    <a:pt x="3223013" y="2659919"/>
+                  </a:lnTo>
+                  <a:lnTo>
+                    <a:pt x="3151391" y="2662000"/>
+                  </a:lnTo>
+                  <a:lnTo>
+                    <a:pt x="3079768" y="2664076"/>
+                  </a:lnTo>
+                  <a:lnTo>
+                    <a:pt x="3008146" y="2666146"/>
+                  </a:lnTo>
+                  <a:lnTo>
+                    <a:pt x="2936523" y="2668211"/>
+                  </a:lnTo>
+                  <a:lnTo>
+                    <a:pt x="2864901" y="2670271"/>
+                  </a:lnTo>
+                  <a:lnTo>
+                    <a:pt x="2793278" y="2672326"/>
+                  </a:lnTo>
+                  <a:lnTo>
+                    <a:pt x="2721655" y="2674376"/>
+                  </a:lnTo>
+                  <a:lnTo>
+                    <a:pt x="2650033" y="2676420"/>
+                  </a:lnTo>
+                  <a:lnTo>
+                    <a:pt x="2578410" y="2678459"/>
+                  </a:lnTo>
+                  <a:lnTo>
+                    <a:pt x="2506788" y="2680493"/>
+                  </a:lnTo>
+                  <a:lnTo>
+                    <a:pt x="2435165" y="2682522"/>
+                  </a:lnTo>
+                  <a:lnTo>
+                    <a:pt x="2363543" y="2684546"/>
+                  </a:lnTo>
+                  <a:lnTo>
+                    <a:pt x="2291920" y="2686565"/>
+                  </a:lnTo>
+                  <a:lnTo>
+                    <a:pt x="2220298" y="2688578"/>
+                  </a:lnTo>
+                  <a:lnTo>
+                    <a:pt x="2148675" y="2690587"/>
+                  </a:lnTo>
+                  <a:lnTo>
+                    <a:pt x="2077053" y="2692590"/>
+                  </a:lnTo>
+                  <a:lnTo>
+                    <a:pt x="2005430" y="2694589"/>
+                  </a:lnTo>
+                  <a:lnTo>
+                    <a:pt x="1933808" y="2696582"/>
+                  </a:lnTo>
+                  <a:lnTo>
+                    <a:pt x="1862185" y="2698571"/>
+                  </a:lnTo>
+                  <a:lnTo>
+                    <a:pt x="1790563" y="2700554"/>
+                  </a:lnTo>
+                  <a:lnTo>
+                    <a:pt x="1718940" y="2702532"/>
+                  </a:lnTo>
+                  <a:lnTo>
+                    <a:pt x="1647318" y="2704505"/>
+                  </a:lnTo>
+                  <a:lnTo>
+                    <a:pt x="1575695" y="2706474"/>
+                  </a:lnTo>
+                  <a:lnTo>
+                    <a:pt x="1504073" y="2708437"/>
+                  </a:lnTo>
+                  <a:lnTo>
+                    <a:pt x="1432450" y="2710395"/>
+                  </a:lnTo>
+                  <a:lnTo>
+                    <a:pt x="1360827" y="2712349"/>
+                  </a:lnTo>
+                  <a:lnTo>
+                    <a:pt x="1289205" y="2714297"/>
+                  </a:lnTo>
+                  <a:lnTo>
+                    <a:pt x="1217582" y="2716241"/>
+                  </a:lnTo>
+                  <a:lnTo>
+                    <a:pt x="1145960" y="2718179"/>
+                  </a:lnTo>
+                  <a:lnTo>
+                    <a:pt x="1074337" y="2720113"/>
+                  </a:lnTo>
+                  <a:lnTo>
+                    <a:pt x="1002715" y="2722042"/>
+                  </a:lnTo>
+                  <a:lnTo>
+                    <a:pt x="931092" y="2723966"/>
+                  </a:lnTo>
+                  <a:lnTo>
+                    <a:pt x="859470" y="2725885"/>
+                  </a:lnTo>
+                  <a:lnTo>
+                    <a:pt x="787847" y="2727800"/>
+                  </a:lnTo>
+                  <a:lnTo>
+                    <a:pt x="716225" y="2729709"/>
+                  </a:lnTo>
+                  <a:lnTo>
+                    <a:pt x="644602" y="2731614"/>
+                  </a:lnTo>
+                  <a:lnTo>
+                    <a:pt x="572980" y="2733513"/>
+                  </a:lnTo>
+                  <a:lnTo>
+                    <a:pt x="501357" y="2735408"/>
+                  </a:lnTo>
+                  <a:lnTo>
+                    <a:pt x="429735" y="2737299"/>
+                  </a:lnTo>
+                  <a:lnTo>
+                    <a:pt x="358112" y="2739184"/>
+                  </a:lnTo>
+                  <a:lnTo>
+                    <a:pt x="286490" y="2741065"/>
+                  </a:lnTo>
+                  <a:lnTo>
+                    <a:pt x="214867" y="2742941"/>
+                  </a:lnTo>
+                  <a:lnTo>
+                    <a:pt x="143245" y="2744812"/>
+                  </a:lnTo>
+                  <a:lnTo>
+                    <a:pt x="71622" y="2746679"/>
+                  </a:lnTo>
+                  <a:lnTo>
+                    <a:pt x="0" y="2748540"/>
                   </a:lnTo>
                   <a:close/>
                 </a:path>
@@ -3569,291 +3569,291 @@
           </p:nvSpPr>
           <p:spPr>
             <a:xfrm>
-              <a:off x="1705149" y="2073503"/>
-              <a:ext cx="6557529" cy="2653625"/>
+              <a:off x="1715242" y="2073503"/>
+              <a:ext cx="6547436" cy="2653645"/>
             </a:xfrm>
             <a:custGeom>
               <a:avLst/>
               <a:pathLst>
-                <a:path w="6557529" h="2653625">
+                <a:path w="6547436" h="2653645">
                   <a:moveTo>
                     <a:pt x="0" y="0"/>
                   </a:moveTo>
                   <a:lnTo>
-                    <a:pt x="39879" y="69002"/>
-                  </a:lnTo>
-                  <a:lnTo>
-                    <a:pt x="111502" y="188586"/>
-                  </a:lnTo>
-                  <a:lnTo>
-                    <a:pt x="183125" y="303983"/>
-                  </a:lnTo>
-                  <a:lnTo>
-                    <a:pt x="254747" y="415338"/>
-                  </a:lnTo>
-                  <a:lnTo>
-                    <a:pt x="326370" y="522794"/>
-                  </a:lnTo>
-                  <a:lnTo>
-                    <a:pt x="397992" y="626487"/>
-                  </a:lnTo>
-                  <a:lnTo>
-                    <a:pt x="469615" y="726548"/>
-                  </a:lnTo>
-                  <a:lnTo>
-                    <a:pt x="541237" y="823106"/>
-                  </a:lnTo>
-                  <a:lnTo>
-                    <a:pt x="612860" y="916281"/>
-                  </a:lnTo>
-                  <a:lnTo>
-                    <a:pt x="684482" y="1006194"/>
-                  </a:lnTo>
-                  <a:lnTo>
-                    <a:pt x="756105" y="1092958"/>
-                  </a:lnTo>
-                  <a:lnTo>
-                    <a:pt x="827727" y="1176684"/>
-                  </a:lnTo>
-                  <a:lnTo>
-                    <a:pt x="899350" y="1257477"/>
-                  </a:lnTo>
-                  <a:lnTo>
-                    <a:pt x="970972" y="1335441"/>
-                  </a:lnTo>
-                  <a:lnTo>
-                    <a:pt x="1042595" y="1410675"/>
-                  </a:lnTo>
-                  <a:lnTo>
-                    <a:pt x="1114217" y="1483274"/>
-                  </a:lnTo>
-                  <a:lnTo>
-                    <a:pt x="1185840" y="1553331"/>
-                  </a:lnTo>
-                  <a:lnTo>
-                    <a:pt x="1257462" y="1620934"/>
-                  </a:lnTo>
-                  <a:lnTo>
-                    <a:pt x="1329085" y="1686170"/>
-                  </a:lnTo>
-                  <a:lnTo>
-                    <a:pt x="1400707" y="1749121"/>
-                  </a:lnTo>
-                  <a:lnTo>
-                    <a:pt x="1472330" y="1809868"/>
-                  </a:lnTo>
-                  <a:lnTo>
-                    <a:pt x="1543953" y="1868487"/>
-                  </a:lnTo>
-                  <a:lnTo>
-                    <a:pt x="1615575" y="1925054"/>
-                  </a:lnTo>
-                  <a:lnTo>
-                    <a:pt x="1687198" y="1979639"/>
-                  </a:lnTo>
-                  <a:lnTo>
-                    <a:pt x="1758820" y="2032313"/>
-                  </a:lnTo>
-                  <a:lnTo>
-                    <a:pt x="1830443" y="2083142"/>
-                  </a:lnTo>
-                  <a:lnTo>
-                    <a:pt x="1902065" y="2132192"/>
-                  </a:lnTo>
-                  <a:lnTo>
-                    <a:pt x="1973688" y="2179523"/>
-                  </a:lnTo>
-                  <a:lnTo>
-                    <a:pt x="2045310" y="2225197"/>
-                  </a:lnTo>
-                  <a:lnTo>
-                    <a:pt x="2116933" y="2269272"/>
-                  </a:lnTo>
-                  <a:lnTo>
-                    <a:pt x="2188555" y="2311803"/>
-                  </a:lnTo>
-                  <a:lnTo>
-                    <a:pt x="2260178" y="2352844"/>
-                  </a:lnTo>
-                  <a:lnTo>
-                    <a:pt x="2331800" y="2392448"/>
-                  </a:lnTo>
-                  <a:lnTo>
-                    <a:pt x="2403423" y="2430666"/>
-                  </a:lnTo>
-                  <a:lnTo>
-                    <a:pt x="2475045" y="2467545"/>
-                  </a:lnTo>
-                  <a:lnTo>
-                    <a:pt x="2546668" y="2503132"/>
-                  </a:lnTo>
-                  <a:lnTo>
-                    <a:pt x="2618290" y="2537473"/>
-                  </a:lnTo>
-                  <a:lnTo>
-                    <a:pt x="2689913" y="2570612"/>
-                  </a:lnTo>
-                  <a:lnTo>
-                    <a:pt x="2761535" y="2602590"/>
-                  </a:lnTo>
-                  <a:lnTo>
-                    <a:pt x="2833158" y="2633448"/>
-                  </a:lnTo>
-                  <a:lnTo>
-                    <a:pt x="2904781" y="2653625"/>
-                  </a:lnTo>
-                  <a:lnTo>
-                    <a:pt x="2976403" y="2651459"/>
-                  </a:lnTo>
-                  <a:lnTo>
-                    <a:pt x="3048026" y="2649287"/>
-                  </a:lnTo>
-                  <a:lnTo>
-                    <a:pt x="3119648" y="2647110"/>
-                  </a:lnTo>
-                  <a:lnTo>
-                    <a:pt x="3191271" y="2644927"/>
-                  </a:lnTo>
-                  <a:lnTo>
-                    <a:pt x="3262893" y="2642738"/>
-                  </a:lnTo>
-                  <a:lnTo>
-                    <a:pt x="3334516" y="2640543"/>
-                  </a:lnTo>
-                  <a:lnTo>
-                    <a:pt x="3406138" y="2638343"/>
-                  </a:lnTo>
-                  <a:lnTo>
-                    <a:pt x="3477761" y="2636137"/>
-                  </a:lnTo>
-                  <a:lnTo>
-                    <a:pt x="3549383" y="2633925"/>
-                  </a:lnTo>
-                  <a:lnTo>
-                    <a:pt x="3621006" y="2631707"/>
-                  </a:lnTo>
-                  <a:lnTo>
-                    <a:pt x="3692628" y="2629484"/>
-                  </a:lnTo>
-                  <a:lnTo>
-                    <a:pt x="3764251" y="2627255"/>
-                  </a:lnTo>
-                  <a:lnTo>
-                    <a:pt x="3835873" y="2625020"/>
-                  </a:lnTo>
-                  <a:lnTo>
-                    <a:pt x="3907496" y="2622779"/>
-                  </a:lnTo>
-                  <a:lnTo>
-                    <a:pt x="3979118" y="2620532"/>
-                  </a:lnTo>
-                  <a:lnTo>
-                    <a:pt x="4050741" y="2618279"/>
-                  </a:lnTo>
-                  <a:lnTo>
-                    <a:pt x="4122363" y="2616021"/>
-                  </a:lnTo>
-                  <a:lnTo>
-                    <a:pt x="4193986" y="2613757"/>
-                  </a:lnTo>
-                  <a:lnTo>
-                    <a:pt x="4265609" y="2611486"/>
-                  </a:lnTo>
-                  <a:lnTo>
-                    <a:pt x="4337231" y="2609210"/>
-                  </a:lnTo>
-                  <a:lnTo>
-                    <a:pt x="4408854" y="2606928"/>
-                  </a:lnTo>
-                  <a:lnTo>
-                    <a:pt x="4480476" y="2604640"/>
-                  </a:lnTo>
-                  <a:lnTo>
-                    <a:pt x="4552099" y="2602346"/>
-                  </a:lnTo>
-                  <a:lnTo>
-                    <a:pt x="4623721" y="2600046"/>
-                  </a:lnTo>
-                  <a:lnTo>
-                    <a:pt x="4695344" y="2597740"/>
-                  </a:lnTo>
-                  <a:lnTo>
-                    <a:pt x="4766966" y="2595428"/>
-                  </a:lnTo>
-                  <a:lnTo>
-                    <a:pt x="4838589" y="2593110"/>
-                  </a:lnTo>
-                  <a:lnTo>
-                    <a:pt x="4910211" y="2590786"/>
-                  </a:lnTo>
-                  <a:lnTo>
-                    <a:pt x="4981834" y="2588456"/>
-                  </a:lnTo>
-                  <a:lnTo>
-                    <a:pt x="5053456" y="2586119"/>
-                  </a:lnTo>
-                  <a:lnTo>
-                    <a:pt x="5125079" y="2583777"/>
-                  </a:lnTo>
-                  <a:lnTo>
-                    <a:pt x="5196701" y="2581429"/>
-                  </a:lnTo>
-                  <a:lnTo>
-                    <a:pt x="5268324" y="2579074"/>
-                  </a:lnTo>
-                  <a:lnTo>
-                    <a:pt x="5339946" y="2576713"/>
-                  </a:lnTo>
-                  <a:lnTo>
-                    <a:pt x="5411569" y="2574346"/>
-                  </a:lnTo>
-                  <a:lnTo>
-                    <a:pt x="5483191" y="2571973"/>
-                  </a:lnTo>
-                  <a:lnTo>
-                    <a:pt x="5554814" y="2569594"/>
-                  </a:lnTo>
-                  <a:lnTo>
-                    <a:pt x="5626437" y="2567209"/>
-                  </a:lnTo>
-                  <a:lnTo>
-                    <a:pt x="5698059" y="2564817"/>
-                  </a:lnTo>
-                  <a:lnTo>
-                    <a:pt x="5769682" y="2562419"/>
-                  </a:lnTo>
-                  <a:lnTo>
-                    <a:pt x="5841304" y="2560015"/>
-                  </a:lnTo>
-                  <a:lnTo>
-                    <a:pt x="5912927" y="2557604"/>
-                  </a:lnTo>
-                  <a:lnTo>
-                    <a:pt x="5984549" y="2555187"/>
-                  </a:lnTo>
-                  <a:lnTo>
-                    <a:pt x="6056172" y="2552764"/>
-                  </a:lnTo>
-                  <a:lnTo>
-                    <a:pt x="6127794" y="2550335"/>
-                  </a:lnTo>
-                  <a:lnTo>
-                    <a:pt x="6199417" y="2547899"/>
-                  </a:lnTo>
-                  <a:lnTo>
-                    <a:pt x="6271039" y="2545457"/>
-                  </a:lnTo>
-                  <a:lnTo>
-                    <a:pt x="6342662" y="2543009"/>
-                  </a:lnTo>
-                  <a:lnTo>
-                    <a:pt x="6414284" y="2540554"/>
-                  </a:lnTo>
-                  <a:lnTo>
-                    <a:pt x="6485907" y="2538093"/>
-                  </a:lnTo>
-                  <a:lnTo>
-                    <a:pt x="6557529" y="2535625"/>
+                    <a:pt x="29786" y="51980"/>
+                  </a:lnTo>
+                  <a:lnTo>
+                    <a:pt x="101409" y="172575"/>
+                  </a:lnTo>
+                  <a:lnTo>
+                    <a:pt x="173031" y="288933"/>
+                  </a:lnTo>
+                  <a:lnTo>
+                    <a:pt x="244654" y="401202"/>
+                  </a:lnTo>
+                  <a:lnTo>
+                    <a:pt x="316276" y="509525"/>
+                  </a:lnTo>
+                  <a:lnTo>
+                    <a:pt x="387899" y="614042"/>
+                  </a:lnTo>
+                  <a:lnTo>
+                    <a:pt x="459521" y="714886"/>
+                  </a:lnTo>
+                  <a:lnTo>
+                    <a:pt x="531144" y="812187"/>
+                  </a:lnTo>
+                  <a:lnTo>
+                    <a:pt x="602766" y="906068"/>
+                  </a:lnTo>
+                  <a:lnTo>
+                    <a:pt x="674389" y="996650"/>
+                  </a:lnTo>
+                  <a:lnTo>
+                    <a:pt x="746011" y="1084049"/>
+                  </a:lnTo>
+                  <a:lnTo>
+                    <a:pt x="817634" y="1168376"/>
+                  </a:lnTo>
+                  <a:lnTo>
+                    <a:pt x="889257" y="1249740"/>
+                  </a:lnTo>
+                  <a:lnTo>
+                    <a:pt x="960879" y="1328245"/>
+                  </a:lnTo>
+                  <a:lnTo>
+                    <a:pt x="1032502" y="1403992"/>
+                  </a:lnTo>
+                  <a:lnTo>
+                    <a:pt x="1104124" y="1477076"/>
+                  </a:lnTo>
+                  <a:lnTo>
+                    <a:pt x="1175747" y="1547593"/>
+                  </a:lnTo>
+                  <a:lnTo>
+                    <a:pt x="1247369" y="1615631"/>
+                  </a:lnTo>
+                  <a:lnTo>
+                    <a:pt x="1318992" y="1681278"/>
+                  </a:lnTo>
+                  <a:lnTo>
+                    <a:pt x="1390614" y="1744619"/>
+                  </a:lnTo>
+                  <a:lnTo>
+                    <a:pt x="1462237" y="1805733"/>
+                  </a:lnTo>
+                  <a:lnTo>
+                    <a:pt x="1533859" y="1864700"/>
+                  </a:lnTo>
+                  <a:lnTo>
+                    <a:pt x="1605482" y="1921595"/>
+                  </a:lnTo>
+                  <a:lnTo>
+                    <a:pt x="1677104" y="1976490"/>
+                  </a:lnTo>
+                  <a:lnTo>
+                    <a:pt x="1748727" y="2029457"/>
+                  </a:lnTo>
+                  <a:lnTo>
+                    <a:pt x="1820349" y="2080562"/>
+                  </a:lnTo>
+                  <a:lnTo>
+                    <a:pt x="1891972" y="2129871"/>
+                  </a:lnTo>
+                  <a:lnTo>
+                    <a:pt x="1963594" y="2177447"/>
+                  </a:lnTo>
+                  <a:lnTo>
+                    <a:pt x="2035217" y="2223352"/>
+                  </a:lnTo>
+                  <a:lnTo>
+                    <a:pt x="2106839" y="2267643"/>
+                  </a:lnTo>
+                  <a:lnTo>
+                    <a:pt x="2178462" y="2310378"/>
+                  </a:lnTo>
+                  <a:lnTo>
+                    <a:pt x="2250085" y="2351612"/>
+                  </a:lnTo>
+                  <a:lnTo>
+                    <a:pt x="2321707" y="2391396"/>
+                  </a:lnTo>
+                  <a:lnTo>
+                    <a:pt x="2393330" y="2429782"/>
+                  </a:lnTo>
+                  <a:lnTo>
+                    <a:pt x="2464952" y="2466819"/>
+                  </a:lnTo>
+                  <a:lnTo>
+                    <a:pt x="2536575" y="2502555"/>
+                  </a:lnTo>
+                  <a:lnTo>
+                    <a:pt x="2608197" y="2537035"/>
+                  </a:lnTo>
+                  <a:lnTo>
+                    <a:pt x="2679820" y="2570303"/>
+                  </a:lnTo>
+                  <a:lnTo>
+                    <a:pt x="2751442" y="2602403"/>
+                  </a:lnTo>
+                  <a:lnTo>
+                    <a:pt x="2823065" y="2633374"/>
+                  </a:lnTo>
+                  <a:lnTo>
+                    <a:pt x="2894687" y="2653645"/>
+                  </a:lnTo>
+                  <a:lnTo>
+                    <a:pt x="2966310" y="2651543"/>
+                  </a:lnTo>
+                  <a:lnTo>
+                    <a:pt x="3037932" y="2649435"/>
+                  </a:lnTo>
+                  <a:lnTo>
+                    <a:pt x="3109555" y="2647322"/>
+                  </a:lnTo>
+                  <a:lnTo>
+                    <a:pt x="3181177" y="2645204"/>
+                  </a:lnTo>
+                  <a:lnTo>
+                    <a:pt x="3252800" y="2643081"/>
+                  </a:lnTo>
+                  <a:lnTo>
+                    <a:pt x="3324422" y="2640952"/>
+                  </a:lnTo>
+                  <a:lnTo>
+                    <a:pt x="3396045" y="2638818"/>
+                  </a:lnTo>
+                  <a:lnTo>
+                    <a:pt x="3467667" y="2636678"/>
+                  </a:lnTo>
+                  <a:lnTo>
+                    <a:pt x="3539290" y="2634533"/>
+                  </a:lnTo>
+                  <a:lnTo>
+                    <a:pt x="3610913" y="2632383"/>
+                  </a:lnTo>
+                  <a:lnTo>
+                    <a:pt x="3682535" y="2630227"/>
+                  </a:lnTo>
+                  <a:lnTo>
+                    <a:pt x="3754158" y="2628065"/>
+                  </a:lnTo>
+                  <a:lnTo>
+                    <a:pt x="3825780" y="2625899"/>
+                  </a:lnTo>
+                  <a:lnTo>
+                    <a:pt x="3897403" y="2623726"/>
+                  </a:lnTo>
+                  <a:lnTo>
+                    <a:pt x="3969025" y="2621548"/>
+                  </a:lnTo>
+                  <a:lnTo>
+                    <a:pt x="4040648" y="2619365"/>
+                  </a:lnTo>
+                  <a:lnTo>
+                    <a:pt x="4112270" y="2617176"/>
+                  </a:lnTo>
+                  <a:lnTo>
+                    <a:pt x="4183893" y="2614982"/>
+                  </a:lnTo>
+                  <a:lnTo>
+                    <a:pt x="4255515" y="2612782"/>
+                  </a:lnTo>
+                  <a:lnTo>
+                    <a:pt x="4327138" y="2610576"/>
+                  </a:lnTo>
+                  <a:lnTo>
+                    <a:pt x="4398760" y="2608365"/>
+                  </a:lnTo>
+                  <a:lnTo>
+                    <a:pt x="4470383" y="2606148"/>
+                  </a:lnTo>
+                  <a:lnTo>
+                    <a:pt x="4542005" y="2603926"/>
+                  </a:lnTo>
+                  <a:lnTo>
+                    <a:pt x="4613628" y="2601698"/>
+                  </a:lnTo>
+                  <a:lnTo>
+                    <a:pt x="4685250" y="2599464"/>
+                  </a:lnTo>
+                  <a:lnTo>
+                    <a:pt x="4756873" y="2597225"/>
+                  </a:lnTo>
+                  <a:lnTo>
+                    <a:pt x="4828495" y="2594980"/>
+                  </a:lnTo>
+                  <a:lnTo>
+                    <a:pt x="4900118" y="2592730"/>
+                  </a:lnTo>
+                  <a:lnTo>
+                    <a:pt x="4971741" y="2590473"/>
+                  </a:lnTo>
+                  <a:lnTo>
+                    <a:pt x="5043363" y="2588211"/>
+                  </a:lnTo>
+                  <a:lnTo>
+                    <a:pt x="5114986" y="2585943"/>
+                  </a:lnTo>
+                  <a:lnTo>
+                    <a:pt x="5186608" y="2583670"/>
+                  </a:lnTo>
+                  <a:lnTo>
+                    <a:pt x="5258231" y="2581391"/>
+                  </a:lnTo>
+                  <a:lnTo>
+                    <a:pt x="5329853" y="2579106"/>
+                  </a:lnTo>
+                  <a:lnTo>
+                    <a:pt x="5401476" y="2576815"/>
+                  </a:lnTo>
+                  <a:lnTo>
+                    <a:pt x="5473098" y="2574518"/>
+                  </a:lnTo>
+                  <a:lnTo>
+                    <a:pt x="5544721" y="2572216"/>
+                  </a:lnTo>
+                  <a:lnTo>
+                    <a:pt x="5616343" y="2569907"/>
+                  </a:lnTo>
+                  <a:lnTo>
+                    <a:pt x="5687966" y="2567593"/>
+                  </a:lnTo>
+                  <a:lnTo>
+                    <a:pt x="5759588" y="2565273"/>
+                  </a:lnTo>
+                  <a:lnTo>
+                    <a:pt x="5831211" y="2562947"/>
+                  </a:lnTo>
+                  <a:lnTo>
+                    <a:pt x="5902833" y="2560616"/>
+                  </a:lnTo>
+                  <a:lnTo>
+                    <a:pt x="5974456" y="2558278"/>
+                  </a:lnTo>
+                  <a:lnTo>
+                    <a:pt x="6046078" y="2555934"/>
+                  </a:lnTo>
+                  <a:lnTo>
+                    <a:pt x="6117701" y="2553585"/>
+                  </a:lnTo>
+                  <a:lnTo>
+                    <a:pt x="6189323" y="2551229"/>
+                  </a:lnTo>
+                  <a:lnTo>
+                    <a:pt x="6260946" y="2548868"/>
+                  </a:lnTo>
+                  <a:lnTo>
+                    <a:pt x="6332569" y="2546501"/>
+                  </a:lnTo>
+                  <a:lnTo>
+                    <a:pt x="6404191" y="2544127"/>
+                  </a:lnTo>
+                  <a:lnTo>
+                    <a:pt x="6475814" y="2541748"/>
+                  </a:lnTo>
+                  <a:lnTo>
+                    <a:pt x="6547436" y="2539362"/>
                   </a:lnTo>
                 </a:path>
               </a:pathLst>
@@ -3873,312 +3873,312 @@
           </p:nvSpPr>
           <p:spPr>
             <a:xfrm>
-              <a:off x="1172049" y="4729289"/>
-              <a:ext cx="7090630" cy="694755"/>
+              <a:off x="1172049" y="4729245"/>
+              <a:ext cx="7090630" cy="695652"/>
             </a:xfrm>
             <a:custGeom>
               <a:avLst/>
               <a:pathLst>
-                <a:path w="7090630" h="694755">
+                <a:path w="7090630" h="695652">
                   <a:moveTo>
-                    <a:pt x="7090630" y="694755"/>
+                    <a:pt x="7090630" y="695652"/>
                   </a:moveTo>
                   <a:lnTo>
-                    <a:pt x="7019007" y="689920"/>
-                  </a:lnTo>
-                  <a:lnTo>
-                    <a:pt x="6947385" y="684911"/>
-                  </a:lnTo>
-                  <a:lnTo>
-                    <a:pt x="6875762" y="679719"/>
-                  </a:lnTo>
-                  <a:lnTo>
-                    <a:pt x="6804139" y="674340"/>
-                  </a:lnTo>
-                  <a:lnTo>
-                    <a:pt x="6732517" y="668765"/>
-                  </a:lnTo>
-                  <a:lnTo>
-                    <a:pt x="6660894" y="662987"/>
-                  </a:lnTo>
-                  <a:lnTo>
-                    <a:pt x="6589272" y="657000"/>
-                  </a:lnTo>
-                  <a:lnTo>
-                    <a:pt x="6517649" y="650796"/>
-                  </a:lnTo>
-                  <a:lnTo>
-                    <a:pt x="6446027" y="644366"/>
-                  </a:lnTo>
-                  <a:lnTo>
-                    <a:pt x="6374404" y="637704"/>
-                  </a:lnTo>
-                  <a:lnTo>
-                    <a:pt x="6302782" y="630799"/>
-                  </a:lnTo>
-                  <a:lnTo>
-                    <a:pt x="6231159" y="623644"/>
-                  </a:lnTo>
-                  <a:lnTo>
-                    <a:pt x="6159537" y="616229"/>
-                  </a:lnTo>
-                  <a:lnTo>
-                    <a:pt x="6087914" y="608545"/>
-                  </a:lnTo>
-                  <a:lnTo>
-                    <a:pt x="6016292" y="600582"/>
-                  </a:lnTo>
-                  <a:lnTo>
-                    <a:pt x="5944669" y="592331"/>
-                  </a:lnTo>
-                  <a:lnTo>
-                    <a:pt x="5873047" y="583779"/>
-                  </a:lnTo>
-                  <a:lnTo>
-                    <a:pt x="5801424" y="574918"/>
-                  </a:lnTo>
-                  <a:lnTo>
-                    <a:pt x="5729802" y="565735"/>
-                  </a:lnTo>
-                  <a:lnTo>
-                    <a:pt x="5658179" y="556218"/>
-                  </a:lnTo>
-                  <a:lnTo>
-                    <a:pt x="5586557" y="546357"/>
-                  </a:lnTo>
-                  <a:lnTo>
-                    <a:pt x="5514934" y="536137"/>
-                  </a:lnTo>
-                  <a:lnTo>
-                    <a:pt x="5443311" y="525546"/>
-                  </a:lnTo>
-                  <a:lnTo>
-                    <a:pt x="5371689" y="514571"/>
-                  </a:lnTo>
-                  <a:lnTo>
-                    <a:pt x="5300066" y="503198"/>
-                  </a:lnTo>
-                  <a:lnTo>
-                    <a:pt x="5228444" y="491412"/>
-                  </a:lnTo>
-                  <a:lnTo>
-                    <a:pt x="5156821" y="479199"/>
-                  </a:lnTo>
-                  <a:lnTo>
-                    <a:pt x="5085199" y="466542"/>
-                  </a:lnTo>
-                  <a:lnTo>
-                    <a:pt x="5013576" y="453426"/>
-                  </a:lnTo>
-                  <a:lnTo>
-                    <a:pt x="4941954" y="439833"/>
-                  </a:lnTo>
-                  <a:lnTo>
-                    <a:pt x="4870331" y="425748"/>
-                  </a:lnTo>
-                  <a:lnTo>
-                    <a:pt x="4798709" y="411151"/>
-                  </a:lnTo>
-                  <a:lnTo>
-                    <a:pt x="4727086" y="396025"/>
-                  </a:lnTo>
-                  <a:lnTo>
-                    <a:pt x="4655464" y="380349"/>
-                  </a:lnTo>
-                  <a:lnTo>
-                    <a:pt x="4583841" y="364105"/>
-                  </a:lnTo>
-                  <a:lnTo>
-                    <a:pt x="4512219" y="347271"/>
-                  </a:lnTo>
-                  <a:lnTo>
-                    <a:pt x="4440596" y="329827"/>
-                  </a:lnTo>
-                  <a:lnTo>
-                    <a:pt x="4368974" y="311749"/>
-                  </a:lnTo>
-                  <a:lnTo>
-                    <a:pt x="4297351" y="293015"/>
-                  </a:lnTo>
-                  <a:lnTo>
-                    <a:pt x="4225729" y="273602"/>
-                  </a:lnTo>
-                  <a:lnTo>
-                    <a:pt x="4154106" y="253483"/>
-                  </a:lnTo>
-                  <a:lnTo>
-                    <a:pt x="4082483" y="232635"/>
-                  </a:lnTo>
-                  <a:lnTo>
-                    <a:pt x="4010861" y="211030"/>
-                  </a:lnTo>
-                  <a:lnTo>
-                    <a:pt x="3939238" y="188641"/>
-                  </a:lnTo>
-                  <a:lnTo>
-                    <a:pt x="3867616" y="165440"/>
-                  </a:lnTo>
-                  <a:lnTo>
-                    <a:pt x="3795993" y="141396"/>
-                  </a:lnTo>
-                  <a:lnTo>
-                    <a:pt x="3724371" y="116480"/>
-                  </a:lnTo>
-                  <a:lnTo>
-                    <a:pt x="3652748" y="90660"/>
-                  </a:lnTo>
-                  <a:lnTo>
-                    <a:pt x="3581126" y="63902"/>
-                  </a:lnTo>
-                  <a:lnTo>
-                    <a:pt x="3509503" y="36174"/>
-                  </a:lnTo>
-                  <a:lnTo>
-                    <a:pt x="3437881" y="7439"/>
+                    <a:pt x="7019007" y="690832"/>
+                  </a:lnTo>
+                  <a:lnTo>
+                    <a:pt x="6947385" y="685836"/>
+                  </a:lnTo>
+                  <a:lnTo>
+                    <a:pt x="6875762" y="680658"/>
+                  </a:lnTo>
+                  <a:lnTo>
+                    <a:pt x="6804139" y="675292"/>
+                  </a:lnTo>
+                  <a:lnTo>
+                    <a:pt x="6732517" y="669730"/>
+                  </a:lnTo>
+                  <a:lnTo>
+                    <a:pt x="6660894" y="663965"/>
+                  </a:lnTo>
+                  <a:lnTo>
+                    <a:pt x="6589272" y="657991"/>
+                  </a:lnTo>
+                  <a:lnTo>
+                    <a:pt x="6517649" y="651799"/>
+                  </a:lnTo>
+                  <a:lnTo>
+                    <a:pt x="6446027" y="645381"/>
+                  </a:lnTo>
+                  <a:lnTo>
+                    <a:pt x="6374404" y="638730"/>
+                  </a:lnTo>
+                  <a:lnTo>
+                    <a:pt x="6302782" y="631836"/>
+                  </a:lnTo>
+                  <a:lnTo>
+                    <a:pt x="6231159" y="624692"/>
+                  </a:lnTo>
+                  <a:lnTo>
+                    <a:pt x="6159537" y="617287"/>
+                  </a:lnTo>
+                  <a:lnTo>
+                    <a:pt x="6087914" y="609612"/>
+                  </a:lnTo>
+                  <a:lnTo>
+                    <a:pt x="6016292" y="601658"/>
+                  </a:lnTo>
+                  <a:lnTo>
+                    <a:pt x="5944669" y="593415"/>
+                  </a:lnTo>
+                  <a:lnTo>
+                    <a:pt x="5873047" y="584871"/>
+                  </a:lnTo>
+                  <a:lnTo>
+                    <a:pt x="5801424" y="576016"/>
+                  </a:lnTo>
+                  <a:lnTo>
+                    <a:pt x="5729802" y="566838"/>
+                  </a:lnTo>
+                  <a:lnTo>
+                    <a:pt x="5658179" y="557326"/>
+                  </a:lnTo>
+                  <a:lnTo>
+                    <a:pt x="5586557" y="547468"/>
+                  </a:lnTo>
+                  <a:lnTo>
+                    <a:pt x="5514934" y="537250"/>
+                  </a:lnTo>
+                  <a:lnTo>
+                    <a:pt x="5443311" y="526661"/>
+                  </a:lnTo>
+                  <a:lnTo>
+                    <a:pt x="5371689" y="515686"/>
+                  </a:lnTo>
+                  <a:lnTo>
+                    <a:pt x="5300066" y="504311"/>
+                  </a:lnTo>
+                  <a:lnTo>
+                    <a:pt x="5228444" y="492522"/>
+                  </a:lnTo>
+                  <a:lnTo>
+                    <a:pt x="5156821" y="480303"/>
+                  </a:lnTo>
+                  <a:lnTo>
+                    <a:pt x="5085199" y="467640"/>
+                  </a:lnTo>
+                  <a:lnTo>
+                    <a:pt x="5013576" y="454515"/>
+                  </a:lnTo>
+                  <a:lnTo>
+                    <a:pt x="4941954" y="440912"/>
+                  </a:lnTo>
+                  <a:lnTo>
+                    <a:pt x="4870331" y="426814"/>
+                  </a:lnTo>
+                  <a:lnTo>
+                    <a:pt x="4798709" y="412202"/>
+                  </a:lnTo>
+                  <a:lnTo>
+                    <a:pt x="4727086" y="397058"/>
+                  </a:lnTo>
+                  <a:lnTo>
+                    <a:pt x="4655464" y="381363"/>
+                  </a:lnTo>
+                  <a:lnTo>
+                    <a:pt x="4583841" y="365096"/>
+                  </a:lnTo>
+                  <a:lnTo>
+                    <a:pt x="4512219" y="348236"/>
+                  </a:lnTo>
+                  <a:lnTo>
+                    <a:pt x="4440596" y="330763"/>
+                  </a:lnTo>
+                  <a:lnTo>
+                    <a:pt x="4368974" y="312653"/>
+                  </a:lnTo>
+                  <a:lnTo>
+                    <a:pt x="4297351" y="293883"/>
+                  </a:lnTo>
+                  <a:lnTo>
+                    <a:pt x="4225729" y="274430"/>
+                  </a:lnTo>
+                  <a:lnTo>
+                    <a:pt x="4154106" y="254269"/>
+                  </a:lnTo>
+                  <a:lnTo>
+                    <a:pt x="4082483" y="233373"/>
+                  </a:lnTo>
+                  <a:lnTo>
+                    <a:pt x="4010861" y="211716"/>
+                  </a:lnTo>
+                  <a:lnTo>
+                    <a:pt x="3939238" y="189270"/>
+                  </a:lnTo>
+                  <a:lnTo>
+                    <a:pt x="3867616" y="166007"/>
+                  </a:lnTo>
+                  <a:lnTo>
+                    <a:pt x="3795993" y="141896"/>
+                  </a:lnTo>
+                  <a:lnTo>
+                    <a:pt x="3724371" y="116908"/>
+                  </a:lnTo>
+                  <a:lnTo>
+                    <a:pt x="3652748" y="91009"/>
+                  </a:lnTo>
+                  <a:lnTo>
+                    <a:pt x="3581126" y="64167"/>
+                  </a:lnTo>
+                  <a:lnTo>
+                    <a:pt x="3509503" y="36348"/>
+                  </a:lnTo>
+                  <a:lnTo>
+                    <a:pt x="3437881" y="7515"/>
                   </a:lnTo>
                   <a:lnTo>
                     <a:pt x="3366258" y="0"/>
                   </a:lnTo>
                   <a:lnTo>
-                    <a:pt x="3294636" y="2154"/>
-                  </a:lnTo>
-                  <a:lnTo>
-                    <a:pt x="3223013" y="4304"/>
-                  </a:lnTo>
-                  <a:lnTo>
-                    <a:pt x="3151391" y="6448"/>
-                  </a:lnTo>
-                  <a:lnTo>
-                    <a:pt x="3079768" y="8586"/>
-                  </a:lnTo>
-                  <a:lnTo>
-                    <a:pt x="3008146" y="10718"/>
-                  </a:lnTo>
-                  <a:lnTo>
-                    <a:pt x="2936523" y="12845"/>
-                  </a:lnTo>
-                  <a:lnTo>
-                    <a:pt x="2864901" y="14967"/>
-                  </a:lnTo>
-                  <a:lnTo>
-                    <a:pt x="2793278" y="17083"/>
-                  </a:lnTo>
-                  <a:lnTo>
-                    <a:pt x="2721655" y="19193"/>
-                  </a:lnTo>
-                  <a:lnTo>
-                    <a:pt x="2650033" y="21298"/>
-                  </a:lnTo>
-                  <a:lnTo>
-                    <a:pt x="2578410" y="23398"/>
-                  </a:lnTo>
-                  <a:lnTo>
-                    <a:pt x="2506788" y="25492"/>
-                  </a:lnTo>
-                  <a:lnTo>
-                    <a:pt x="2435165" y="27580"/>
-                  </a:lnTo>
-                  <a:lnTo>
-                    <a:pt x="2363543" y="29664"/>
-                  </a:lnTo>
-                  <a:lnTo>
-                    <a:pt x="2291920" y="31741"/>
-                  </a:lnTo>
-                  <a:lnTo>
-                    <a:pt x="2220298" y="33814"/>
-                  </a:lnTo>
-                  <a:lnTo>
-                    <a:pt x="2148675" y="35881"/>
-                  </a:lnTo>
-                  <a:lnTo>
-                    <a:pt x="2077053" y="37942"/>
-                  </a:lnTo>
-                  <a:lnTo>
-                    <a:pt x="2005430" y="39998"/>
-                  </a:lnTo>
-                  <a:lnTo>
-                    <a:pt x="1933808" y="42049"/>
-                  </a:lnTo>
-                  <a:lnTo>
-                    <a:pt x="1862185" y="44095"/>
-                  </a:lnTo>
-                  <a:lnTo>
-                    <a:pt x="1790563" y="46135"/>
-                  </a:lnTo>
-                  <a:lnTo>
-                    <a:pt x="1718940" y="48170"/>
-                  </a:lnTo>
-                  <a:lnTo>
-                    <a:pt x="1647318" y="50199"/>
-                  </a:lnTo>
-                  <a:lnTo>
-                    <a:pt x="1575695" y="52223"/>
-                  </a:lnTo>
-                  <a:lnTo>
-                    <a:pt x="1504073" y="54242"/>
-                  </a:lnTo>
-                  <a:lnTo>
-                    <a:pt x="1432450" y="56256"/>
-                  </a:lnTo>
-                  <a:lnTo>
-                    <a:pt x="1360827" y="58265"/>
-                  </a:lnTo>
-                  <a:lnTo>
-                    <a:pt x="1289205" y="60268"/>
-                  </a:lnTo>
-                  <a:lnTo>
-                    <a:pt x="1217582" y="62266"/>
-                  </a:lnTo>
-                  <a:lnTo>
-                    <a:pt x="1145960" y="64259"/>
-                  </a:lnTo>
-                  <a:lnTo>
-                    <a:pt x="1074337" y="66247"/>
-                  </a:lnTo>
-                  <a:lnTo>
-                    <a:pt x="1002715" y="68229"/>
-                  </a:lnTo>
-                  <a:lnTo>
-                    <a:pt x="931092" y="70207"/>
-                  </a:lnTo>
-                  <a:lnTo>
-                    <a:pt x="859470" y="72179"/>
-                  </a:lnTo>
-                  <a:lnTo>
-                    <a:pt x="787847" y="74146"/>
-                  </a:lnTo>
-                  <a:lnTo>
-                    <a:pt x="716225" y="76108"/>
-                  </a:lnTo>
-                  <a:lnTo>
-                    <a:pt x="644602" y="78065"/>
-                  </a:lnTo>
-                  <a:lnTo>
-                    <a:pt x="572980" y="80016"/>
-                  </a:lnTo>
-                  <a:lnTo>
-                    <a:pt x="501357" y="81963"/>
-                  </a:lnTo>
-                  <a:lnTo>
-                    <a:pt x="429735" y="83905"/>
-                  </a:lnTo>
-                  <a:lnTo>
-                    <a:pt x="358112" y="85841"/>
-                  </a:lnTo>
-                  <a:lnTo>
-                    <a:pt x="286490" y="87773"/>
-                  </a:lnTo>
-                  <a:lnTo>
-                    <a:pt x="214867" y="89699"/>
-                  </a:lnTo>
-                  <a:lnTo>
-                    <a:pt x="143245" y="91621"/>
-                  </a:lnTo>
-                  <a:lnTo>
-                    <a:pt x="71622" y="93537"/>
-                  </a:lnTo>
-                  <a:lnTo>
-                    <a:pt x="0" y="95449"/>
+                    <a:pt x="3294636" y="2091"/>
+                  </a:lnTo>
+                  <a:lnTo>
+                    <a:pt x="3223013" y="4177"/>
+                  </a:lnTo>
+                  <a:lnTo>
+                    <a:pt x="3151391" y="6258"/>
+                  </a:lnTo>
+                  <a:lnTo>
+                    <a:pt x="3079768" y="8334"/>
+                  </a:lnTo>
+                  <a:lnTo>
+                    <a:pt x="3008146" y="10404"/>
+                  </a:lnTo>
+                  <a:lnTo>
+                    <a:pt x="2936523" y="12469"/>
+                  </a:lnTo>
+                  <a:lnTo>
+                    <a:pt x="2864901" y="14529"/>
+                  </a:lnTo>
+                  <a:lnTo>
+                    <a:pt x="2793278" y="16584"/>
+                  </a:lnTo>
+                  <a:lnTo>
+                    <a:pt x="2721655" y="18634"/>
+                  </a:lnTo>
+                  <a:lnTo>
+                    <a:pt x="2650033" y="20678"/>
+                  </a:lnTo>
+                  <a:lnTo>
+                    <a:pt x="2578410" y="22717"/>
+                  </a:lnTo>
+                  <a:lnTo>
+                    <a:pt x="2506788" y="24751"/>
+                  </a:lnTo>
+                  <a:lnTo>
+                    <a:pt x="2435165" y="26780"/>
+                  </a:lnTo>
+                  <a:lnTo>
+                    <a:pt x="2363543" y="28804"/>
+                  </a:lnTo>
+                  <a:lnTo>
+                    <a:pt x="2291920" y="30823"/>
+                  </a:lnTo>
+                  <a:lnTo>
+                    <a:pt x="2220298" y="32836"/>
+                  </a:lnTo>
+                  <a:lnTo>
+                    <a:pt x="2148675" y="34845"/>
+                  </a:lnTo>
+                  <a:lnTo>
+                    <a:pt x="2077053" y="36848"/>
+                  </a:lnTo>
+                  <a:lnTo>
+                    <a:pt x="2005430" y="38847"/>
+                  </a:lnTo>
+                  <a:lnTo>
+                    <a:pt x="1933808" y="40840"/>
+                  </a:lnTo>
+                  <a:lnTo>
+                    <a:pt x="1862185" y="42829"/>
+                  </a:lnTo>
+                  <a:lnTo>
+                    <a:pt x="1790563" y="44812"/>
+                  </a:lnTo>
+                  <a:lnTo>
+                    <a:pt x="1718940" y="46790"/>
+                  </a:lnTo>
+                  <a:lnTo>
+                    <a:pt x="1647318" y="48763"/>
+                  </a:lnTo>
+                  <a:lnTo>
+                    <a:pt x="1575695" y="50732"/>
+                  </a:lnTo>
+                  <a:lnTo>
+                    <a:pt x="1504073" y="52695"/>
+                  </a:lnTo>
+                  <a:lnTo>
+                    <a:pt x="1432450" y="54653"/>
+                  </a:lnTo>
+                  <a:lnTo>
+                    <a:pt x="1360827" y="56607"/>
+                  </a:lnTo>
+                  <a:lnTo>
+                    <a:pt x="1289205" y="58555"/>
+                  </a:lnTo>
+                  <a:lnTo>
+                    <a:pt x="1217582" y="60499"/>
+                  </a:lnTo>
+                  <a:lnTo>
+                    <a:pt x="1145960" y="62437"/>
+                  </a:lnTo>
+                  <a:lnTo>
+                    <a:pt x="1074337" y="64371"/>
+                  </a:lnTo>
+                  <a:lnTo>
+                    <a:pt x="1002715" y="66300"/>
+                  </a:lnTo>
+                  <a:lnTo>
+                    <a:pt x="931092" y="68224"/>
+                  </a:lnTo>
+                  <a:lnTo>
+                    <a:pt x="859470" y="70143"/>
+                  </a:lnTo>
+                  <a:lnTo>
+                    <a:pt x="787847" y="72058"/>
+                  </a:lnTo>
+                  <a:lnTo>
+                    <a:pt x="716225" y="73967"/>
+                  </a:lnTo>
+                  <a:lnTo>
+                    <a:pt x="644602" y="75872"/>
+                  </a:lnTo>
+                  <a:lnTo>
+                    <a:pt x="572980" y="77771"/>
+                  </a:lnTo>
+                  <a:lnTo>
+                    <a:pt x="501357" y="79666"/>
+                  </a:lnTo>
+                  <a:lnTo>
+                    <a:pt x="429735" y="81557"/>
+                  </a:lnTo>
+                  <a:lnTo>
+                    <a:pt x="358112" y="83442"/>
+                  </a:lnTo>
+                  <a:lnTo>
+                    <a:pt x="286490" y="85323"/>
+                  </a:lnTo>
+                  <a:lnTo>
+                    <a:pt x="214867" y="87199"/>
+                  </a:lnTo>
+                  <a:lnTo>
+                    <a:pt x="143245" y="89070"/>
+                  </a:lnTo>
+                  <a:lnTo>
+                    <a:pt x="71622" y="90937"/>
+                  </a:lnTo>
+                  <a:lnTo>
+                    <a:pt x="0" y="92798"/>
                   </a:lnTo>
                 </a:path>
               </a:pathLst>
@@ -4198,312 +4198,312 @@
           </p:nvSpPr>
           <p:spPr>
             <a:xfrm>
-              <a:off x="1172049" y="3733298"/>
-              <a:ext cx="7090630" cy="1468570"/>
+              <a:off x="1172049" y="3724480"/>
+              <a:ext cx="7090630" cy="1479228"/>
             </a:xfrm>
             <a:custGeom>
               <a:avLst/>
               <a:pathLst>
-                <a:path w="7090630" h="1468570">
+                <a:path w="7090630" h="1479228">
                   <a:moveTo>
                     <a:pt x="0" y="0"/>
                   </a:moveTo>
                   <a:lnTo>
-                    <a:pt x="71622" y="29885"/>
-                  </a:lnTo>
-                  <a:lnTo>
-                    <a:pt x="143245" y="59281"/>
-                  </a:lnTo>
-                  <a:lnTo>
-                    <a:pt x="214867" y="88196"/>
-                  </a:lnTo>
-                  <a:lnTo>
-                    <a:pt x="286490" y="116637"/>
-                  </a:lnTo>
-                  <a:lnTo>
-                    <a:pt x="358112" y="144611"/>
-                  </a:lnTo>
-                  <a:lnTo>
-                    <a:pt x="429735" y="172128"/>
-                  </a:lnTo>
-                  <a:lnTo>
-                    <a:pt x="501357" y="199193"/>
-                  </a:lnTo>
-                  <a:lnTo>
-                    <a:pt x="572980" y="225815"/>
-                  </a:lnTo>
-                  <a:lnTo>
-                    <a:pt x="644602" y="252001"/>
-                  </a:lnTo>
-                  <a:lnTo>
-                    <a:pt x="716225" y="277758"/>
-                  </a:lnTo>
-                  <a:lnTo>
-                    <a:pt x="787847" y="303092"/>
-                  </a:lnTo>
-                  <a:lnTo>
-                    <a:pt x="859470" y="328012"/>
-                  </a:lnTo>
-                  <a:lnTo>
-                    <a:pt x="931092" y="352523"/>
-                  </a:lnTo>
-                  <a:lnTo>
-                    <a:pt x="1002715" y="376633"/>
-                  </a:lnTo>
-                  <a:lnTo>
-                    <a:pt x="1074337" y="400347"/>
-                  </a:lnTo>
-                  <a:lnTo>
-                    <a:pt x="1145960" y="423673"/>
-                  </a:lnTo>
-                  <a:lnTo>
-                    <a:pt x="1217582" y="446617"/>
-                  </a:lnTo>
-                  <a:lnTo>
-                    <a:pt x="1289205" y="469185"/>
-                  </a:lnTo>
-                  <a:lnTo>
-                    <a:pt x="1360827" y="491383"/>
-                  </a:lnTo>
-                  <a:lnTo>
-                    <a:pt x="1432450" y="513218"/>
-                  </a:lnTo>
-                  <a:lnTo>
-                    <a:pt x="1504073" y="534694"/>
-                  </a:lnTo>
-                  <a:lnTo>
-                    <a:pt x="1575695" y="555819"/>
-                  </a:lnTo>
-                  <a:lnTo>
-                    <a:pt x="1647318" y="576598"/>
-                  </a:lnTo>
-                  <a:lnTo>
-                    <a:pt x="1718940" y="597036"/>
-                  </a:lnTo>
-                  <a:lnTo>
-                    <a:pt x="1790563" y="617139"/>
-                  </a:lnTo>
-                  <a:lnTo>
-                    <a:pt x="1862185" y="636913"/>
-                  </a:lnTo>
-                  <a:lnTo>
-                    <a:pt x="1933808" y="656363"/>
-                  </a:lnTo>
-                  <a:lnTo>
-                    <a:pt x="2005430" y="675494"/>
-                  </a:lnTo>
-                  <a:lnTo>
-                    <a:pt x="2077053" y="694312"/>
-                  </a:lnTo>
-                  <a:lnTo>
-                    <a:pt x="2148675" y="712821"/>
-                  </a:lnTo>
-                  <a:lnTo>
-                    <a:pt x="2220298" y="731027"/>
-                  </a:lnTo>
-                  <a:lnTo>
-                    <a:pt x="2291920" y="748935"/>
-                  </a:lnTo>
-                  <a:lnTo>
-                    <a:pt x="2363543" y="766549"/>
-                  </a:lnTo>
-                  <a:lnTo>
-                    <a:pt x="2435165" y="783875"/>
-                  </a:lnTo>
-                  <a:lnTo>
-                    <a:pt x="2506788" y="800917"/>
-                  </a:lnTo>
-                  <a:lnTo>
-                    <a:pt x="2578410" y="817680"/>
-                  </a:lnTo>
-                  <a:lnTo>
-                    <a:pt x="2650033" y="834167"/>
-                  </a:lnTo>
-                  <a:lnTo>
-                    <a:pt x="2721655" y="850385"/>
-                  </a:lnTo>
-                  <a:lnTo>
-                    <a:pt x="2793278" y="866337"/>
-                  </a:lnTo>
-                  <a:lnTo>
-                    <a:pt x="2864901" y="882028"/>
-                  </a:lnTo>
-                  <a:lnTo>
-                    <a:pt x="2936523" y="897462"/>
-                  </a:lnTo>
-                  <a:lnTo>
-                    <a:pt x="3008146" y="912642"/>
-                  </a:lnTo>
-                  <a:lnTo>
-                    <a:pt x="3079768" y="927574"/>
-                  </a:lnTo>
-                  <a:lnTo>
-                    <a:pt x="3151391" y="942262"/>
-                  </a:lnTo>
-                  <a:lnTo>
-                    <a:pt x="3223013" y="956708"/>
-                  </a:lnTo>
-                  <a:lnTo>
-                    <a:pt x="3294636" y="970918"/>
-                  </a:lnTo>
-                  <a:lnTo>
-                    <a:pt x="3366258" y="984895"/>
-                  </a:lnTo>
-                  <a:lnTo>
-                    <a:pt x="3437881" y="998643"/>
-                  </a:lnTo>
-                  <a:lnTo>
-                    <a:pt x="3509503" y="1012166"/>
-                  </a:lnTo>
-                  <a:lnTo>
-                    <a:pt x="3581126" y="1025468"/>
-                  </a:lnTo>
-                  <a:lnTo>
-                    <a:pt x="3652748" y="1038551"/>
-                  </a:lnTo>
-                  <a:lnTo>
-                    <a:pt x="3724371" y="1051420"/>
-                  </a:lnTo>
-                  <a:lnTo>
-                    <a:pt x="3795993" y="1064078"/>
-                  </a:lnTo>
-                  <a:lnTo>
-                    <a:pt x="3867616" y="1076529"/>
-                  </a:lnTo>
-                  <a:lnTo>
-                    <a:pt x="3939238" y="1088775"/>
-                  </a:lnTo>
-                  <a:lnTo>
-                    <a:pt x="4010861" y="1100821"/>
-                  </a:lnTo>
-                  <a:lnTo>
-                    <a:pt x="4082483" y="1112670"/>
-                  </a:lnTo>
-                  <a:lnTo>
-                    <a:pt x="4154106" y="1124324"/>
-                  </a:lnTo>
-                  <a:lnTo>
-                    <a:pt x="4225729" y="1135788"/>
-                  </a:lnTo>
-                  <a:lnTo>
-                    <a:pt x="4297351" y="1147064"/>
-                  </a:lnTo>
-                  <a:lnTo>
-                    <a:pt x="4368974" y="1158155"/>
-                  </a:lnTo>
-                  <a:lnTo>
-                    <a:pt x="4440596" y="1169064"/>
-                  </a:lnTo>
-                  <a:lnTo>
-                    <a:pt x="4512219" y="1179794"/>
-                  </a:lnTo>
-                  <a:lnTo>
-                    <a:pt x="4583841" y="1190349"/>
-                  </a:lnTo>
-                  <a:lnTo>
-                    <a:pt x="4655464" y="1200731"/>
-                  </a:lnTo>
-                  <a:lnTo>
-                    <a:pt x="4727086" y="1210942"/>
-                  </a:lnTo>
-                  <a:lnTo>
-                    <a:pt x="4798709" y="1220986"/>
-                  </a:lnTo>
-                  <a:lnTo>
-                    <a:pt x="4870331" y="1230866"/>
-                  </a:lnTo>
-                  <a:lnTo>
-                    <a:pt x="4941954" y="1240584"/>
-                  </a:lnTo>
-                  <a:lnTo>
-                    <a:pt x="5013576" y="1250142"/>
-                  </a:lnTo>
-                  <a:lnTo>
-                    <a:pt x="5085199" y="1259544"/>
-                  </a:lnTo>
-                  <a:lnTo>
-                    <a:pt x="5156821" y="1268792"/>
-                  </a:lnTo>
-                  <a:lnTo>
-                    <a:pt x="5228444" y="1277889"/>
-                  </a:lnTo>
-                  <a:lnTo>
-                    <a:pt x="5300066" y="1286836"/>
-                  </a:lnTo>
-                  <a:lnTo>
-                    <a:pt x="5371689" y="1295637"/>
-                  </a:lnTo>
-                  <a:lnTo>
-                    <a:pt x="5443311" y="1304293"/>
-                  </a:lnTo>
-                  <a:lnTo>
-                    <a:pt x="5514934" y="1312808"/>
-                  </a:lnTo>
-                  <a:lnTo>
-                    <a:pt x="5586557" y="1321183"/>
-                  </a:lnTo>
-                  <a:lnTo>
-                    <a:pt x="5658179" y="1329421"/>
-                  </a:lnTo>
-                  <a:lnTo>
-                    <a:pt x="5729802" y="1337524"/>
-                  </a:lnTo>
-                  <a:lnTo>
-                    <a:pt x="5801424" y="1345494"/>
-                  </a:lnTo>
-                  <a:lnTo>
-                    <a:pt x="5873047" y="1353334"/>
-                  </a:lnTo>
-                  <a:lnTo>
-                    <a:pt x="5944669" y="1361045"/>
-                  </a:lnTo>
-                  <a:lnTo>
-                    <a:pt x="6016292" y="1368630"/>
-                  </a:lnTo>
-                  <a:lnTo>
-                    <a:pt x="6087914" y="1376090"/>
-                  </a:lnTo>
-                  <a:lnTo>
-                    <a:pt x="6159537" y="1383429"/>
-                  </a:lnTo>
-                  <a:lnTo>
-                    <a:pt x="6231159" y="1390647"/>
-                  </a:lnTo>
-                  <a:lnTo>
-                    <a:pt x="6302782" y="1397747"/>
-                  </a:lnTo>
-                  <a:lnTo>
-                    <a:pt x="6374404" y="1404730"/>
-                  </a:lnTo>
-                  <a:lnTo>
-                    <a:pt x="6446027" y="1411599"/>
-                  </a:lnTo>
-                  <a:lnTo>
-                    <a:pt x="6517649" y="1418355"/>
-                  </a:lnTo>
-                  <a:lnTo>
-                    <a:pt x="6589272" y="1425001"/>
-                  </a:lnTo>
-                  <a:lnTo>
-                    <a:pt x="6660894" y="1431538"/>
-                  </a:lnTo>
-                  <a:lnTo>
-                    <a:pt x="6732517" y="1437968"/>
-                  </a:lnTo>
-                  <a:lnTo>
-                    <a:pt x="6804139" y="1444292"/>
-                  </a:lnTo>
-                  <a:lnTo>
-                    <a:pt x="6875762" y="1450513"/>
-                  </a:lnTo>
-                  <a:lnTo>
-                    <a:pt x="6947385" y="1456632"/>
-                  </a:lnTo>
-                  <a:lnTo>
-                    <a:pt x="7019007" y="1462650"/>
-                  </a:lnTo>
-                  <a:lnTo>
-                    <a:pt x="7090630" y="1468570"/>
+                    <a:pt x="71622" y="30212"/>
+                  </a:lnTo>
+                  <a:lnTo>
+                    <a:pt x="143245" y="59927"/>
+                  </a:lnTo>
+                  <a:lnTo>
+                    <a:pt x="214867" y="89151"/>
+                  </a:lnTo>
+                  <a:lnTo>
+                    <a:pt x="286490" y="117894"/>
+                  </a:lnTo>
+                  <a:lnTo>
+                    <a:pt x="358112" y="146164"/>
+                  </a:lnTo>
+                  <a:lnTo>
+                    <a:pt x="429735" y="173967"/>
+                  </a:lnTo>
+                  <a:lnTo>
+                    <a:pt x="501357" y="201311"/>
+                  </a:lnTo>
+                  <a:lnTo>
+                    <a:pt x="572980" y="228206"/>
+                  </a:lnTo>
+                  <a:lnTo>
+                    <a:pt x="644602" y="254656"/>
+                  </a:lnTo>
+                  <a:lnTo>
+                    <a:pt x="716225" y="280671"/>
+                  </a:lnTo>
+                  <a:lnTo>
+                    <a:pt x="787847" y="306257"/>
+                  </a:lnTo>
+                  <a:lnTo>
+                    <a:pt x="859470" y="331421"/>
+                  </a:lnTo>
+                  <a:lnTo>
+                    <a:pt x="931092" y="356170"/>
+                  </a:lnTo>
+                  <a:lnTo>
+                    <a:pt x="1002715" y="380511"/>
+                  </a:lnTo>
+                  <a:lnTo>
+                    <a:pt x="1074337" y="404451"/>
+                  </a:lnTo>
+                  <a:lnTo>
+                    <a:pt x="1145960" y="427997"/>
+                  </a:lnTo>
+                  <a:lnTo>
+                    <a:pt x="1217582" y="451154"/>
+                  </a:lnTo>
+                  <a:lnTo>
+                    <a:pt x="1289205" y="473929"/>
+                  </a:lnTo>
+                  <a:lnTo>
+                    <a:pt x="1360827" y="496329"/>
+                  </a:lnTo>
+                  <a:lnTo>
+                    <a:pt x="1432450" y="518360"/>
+                  </a:lnTo>
+                  <a:lnTo>
+                    <a:pt x="1504073" y="540028"/>
+                  </a:lnTo>
+                  <a:lnTo>
+                    <a:pt x="1575695" y="561338"/>
+                  </a:lnTo>
+                  <a:lnTo>
+                    <a:pt x="1647318" y="582297"/>
+                  </a:lnTo>
+                  <a:lnTo>
+                    <a:pt x="1718940" y="602911"/>
+                  </a:lnTo>
+                  <a:lnTo>
+                    <a:pt x="1790563" y="623185"/>
+                  </a:lnTo>
+                  <a:lnTo>
+                    <a:pt x="1862185" y="643124"/>
+                  </a:lnTo>
+                  <a:lnTo>
+                    <a:pt x="1933808" y="662735"/>
+                  </a:lnTo>
+                  <a:lnTo>
+                    <a:pt x="2005430" y="682023"/>
+                  </a:lnTo>
+                  <a:lnTo>
+                    <a:pt x="2077053" y="700993"/>
+                  </a:lnTo>
+                  <a:lnTo>
+                    <a:pt x="2148675" y="719650"/>
+                  </a:lnTo>
+                  <a:lnTo>
+                    <a:pt x="2220298" y="737999"/>
+                  </a:lnTo>
+                  <a:lnTo>
+                    <a:pt x="2291920" y="756046"/>
+                  </a:lnTo>
+                  <a:lnTo>
+                    <a:pt x="2363543" y="773795"/>
+                  </a:lnTo>
+                  <a:lnTo>
+                    <a:pt x="2435165" y="791252"/>
+                  </a:lnTo>
+                  <a:lnTo>
+                    <a:pt x="2506788" y="808421"/>
+                  </a:lnTo>
+                  <a:lnTo>
+                    <a:pt x="2578410" y="825307"/>
+                  </a:lnTo>
+                  <a:lnTo>
+                    <a:pt x="2650033" y="841915"/>
+                  </a:lnTo>
+                  <a:lnTo>
+                    <a:pt x="2721655" y="858249"/>
+                  </a:lnTo>
+                  <a:lnTo>
+                    <a:pt x="2793278" y="874314"/>
+                  </a:lnTo>
+                  <a:lnTo>
+                    <a:pt x="2864901" y="890113"/>
+                  </a:lnTo>
+                  <a:lnTo>
+                    <a:pt x="2936523" y="905653"/>
+                  </a:lnTo>
+                  <a:lnTo>
+                    <a:pt x="3008146" y="920936"/>
+                  </a:lnTo>
+                  <a:lnTo>
+                    <a:pt x="3079768" y="935967"/>
+                  </a:lnTo>
+                  <a:lnTo>
+                    <a:pt x="3151391" y="950751"/>
+                  </a:lnTo>
+                  <a:lnTo>
+                    <a:pt x="3223013" y="965290"/>
+                  </a:lnTo>
+                  <a:lnTo>
+                    <a:pt x="3294636" y="979591"/>
+                  </a:lnTo>
+                  <a:lnTo>
+                    <a:pt x="3366258" y="993655"/>
+                  </a:lnTo>
+                  <a:lnTo>
+                    <a:pt x="3437881" y="1007487"/>
+                  </a:lnTo>
+                  <a:lnTo>
+                    <a:pt x="3509503" y="1021092"/>
+                  </a:lnTo>
+                  <a:lnTo>
+                    <a:pt x="3581126" y="1034472"/>
+                  </a:lnTo>
+                  <a:lnTo>
+                    <a:pt x="3652748" y="1047632"/>
+                  </a:lnTo>
+                  <a:lnTo>
+                    <a:pt x="3724371" y="1060575"/>
+                  </a:lnTo>
+                  <a:lnTo>
+                    <a:pt x="3795993" y="1073304"/>
+                  </a:lnTo>
+                  <a:lnTo>
+                    <a:pt x="3867616" y="1085824"/>
+                  </a:lnTo>
+                  <a:lnTo>
+                    <a:pt x="3939238" y="1098137"/>
+                  </a:lnTo>
+                  <a:lnTo>
+                    <a:pt x="4010861" y="1110247"/>
+                  </a:lnTo>
+                  <a:lnTo>
+                    <a:pt x="4082483" y="1122157"/>
+                  </a:lnTo>
+                  <a:lnTo>
+                    <a:pt x="4154106" y="1133872"/>
+                  </a:lnTo>
+                  <a:lnTo>
+                    <a:pt x="4225729" y="1145393"/>
+                  </a:lnTo>
+                  <a:lnTo>
+                    <a:pt x="4297351" y="1156724"/>
+                  </a:lnTo>
+                  <a:lnTo>
+                    <a:pt x="4368974" y="1167868"/>
+                  </a:lnTo>
+                  <a:lnTo>
+                    <a:pt x="4440596" y="1178829"/>
+                  </a:lnTo>
+                  <a:lnTo>
+                    <a:pt x="4512219" y="1189609"/>
+                  </a:lnTo>
+                  <a:lnTo>
+                    <a:pt x="4583841" y="1200211"/>
+                  </a:lnTo>
+                  <a:lnTo>
+                    <a:pt x="4655464" y="1210639"/>
+                  </a:lnTo>
+                  <a:lnTo>
+                    <a:pt x="4727086" y="1220894"/>
+                  </a:lnTo>
+                  <a:lnTo>
+                    <a:pt x="4798709" y="1230981"/>
+                  </a:lnTo>
+                  <a:lnTo>
+                    <a:pt x="4870331" y="1240901"/>
+                  </a:lnTo>
+                  <a:lnTo>
+                    <a:pt x="4941954" y="1250658"/>
+                  </a:lnTo>
+                  <a:lnTo>
+                    <a:pt x="5013576" y="1260254"/>
+                  </a:lnTo>
+                  <a:lnTo>
+                    <a:pt x="5085199" y="1269692"/>
+                  </a:lnTo>
+                  <a:lnTo>
+                    <a:pt x="5156821" y="1278974"/>
+                  </a:lnTo>
+                  <a:lnTo>
+                    <a:pt x="5228444" y="1288103"/>
+                  </a:lnTo>
+                  <a:lnTo>
+                    <a:pt x="5300066" y="1297082"/>
+                  </a:lnTo>
+                  <a:lnTo>
+                    <a:pt x="5371689" y="1305912"/>
+                  </a:lnTo>
+                  <a:lnTo>
+                    <a:pt x="5443311" y="1314597"/>
+                  </a:lnTo>
+                  <a:lnTo>
+                    <a:pt x="5514934" y="1323139"/>
+                  </a:lnTo>
+                  <a:lnTo>
+                    <a:pt x="5586557" y="1331540"/>
+                  </a:lnTo>
+                  <a:lnTo>
+                    <a:pt x="5658179" y="1339803"/>
+                  </a:lnTo>
+                  <a:lnTo>
+                    <a:pt x="5729802" y="1347929"/>
+                  </a:lnTo>
+                  <a:lnTo>
+                    <a:pt x="5801424" y="1355922"/>
+                  </a:lnTo>
+                  <a:lnTo>
+                    <a:pt x="5873047" y="1363782"/>
+                  </a:lnTo>
+                  <a:lnTo>
+                    <a:pt x="5944669" y="1371513"/>
+                  </a:lnTo>
+                  <a:lnTo>
+                    <a:pt x="6016292" y="1379117"/>
+                  </a:lnTo>
+                  <a:lnTo>
+                    <a:pt x="6087914" y="1386595"/>
+                  </a:lnTo>
+                  <a:lnTo>
+                    <a:pt x="6159537" y="1393950"/>
+                  </a:lnTo>
+                  <a:lnTo>
+                    <a:pt x="6231159" y="1401184"/>
+                  </a:lnTo>
+                  <a:lnTo>
+                    <a:pt x="6302782" y="1408299"/>
+                  </a:lnTo>
+                  <a:lnTo>
+                    <a:pt x="6374404" y="1415296"/>
+                  </a:lnTo>
+                  <a:lnTo>
+                    <a:pt x="6446027" y="1422178"/>
+                  </a:lnTo>
+                  <a:lnTo>
+                    <a:pt x="6517649" y="1428946"/>
+                  </a:lnTo>
+                  <a:lnTo>
+                    <a:pt x="6589272" y="1435603"/>
+                  </a:lnTo>
+                  <a:lnTo>
+                    <a:pt x="6660894" y="1442150"/>
+                  </a:lnTo>
+                  <a:lnTo>
+                    <a:pt x="6732517" y="1448590"/>
+                  </a:lnTo>
+                  <a:lnTo>
+                    <a:pt x="6804139" y="1454923"/>
+                  </a:lnTo>
+                  <a:lnTo>
+                    <a:pt x="6875762" y="1461151"/>
+                  </a:lnTo>
+                  <a:lnTo>
+                    <a:pt x="6947385" y="1467277"/>
+                  </a:lnTo>
+                  <a:lnTo>
+                    <a:pt x="7019007" y="1473302"/>
+                  </a:lnTo>
+                  <a:lnTo>
+                    <a:pt x="7090630" y="1479228"/>
                   </a:lnTo>
                 </a:path>
               </a:pathLst>
@@ -5111,7 +5111,7 @@
                   <a:latin typeface="Helvetica"/>
                   <a:cs typeface="Helvetica"/>
                 </a:rPr>
-                <a:t>subHR per 10 % decline: 1.22 (0.97-1.53), p = 0.090  |  per IQR decline (Δ = 29.3 %): 1.79 (0.91-3.50)  |  IQR: [-14.6, 14.7] %</a:t>
+                <a:t>subHR per 10 % decline: 1.22 (0.97-1.54), p = 0.089  |  per IQR decline (Δ = 29.3 %): 1.79 (0.91-3.52)  |  IQR: [-14.6, 14.7] %</a:t>
               </a:r>
             </a:p>
           </p:txBody>
